--- a/Documentation/Slides/Week_31.pptx
+++ b/Documentation/Slides/Week_31.pptx
@@ -5,42 +5,47 @@
     <p:sldMasterId id="2147483648" r:id="rId4"/>
   </p:sldMasterIdLst>
   <p:notesMasterIdLst>
-    <p:notesMasterId r:id="rId9"/>
+    <p:notesMasterId r:id="rId14"/>
   </p:notesMasterIdLst>
   <p:sldIdLst>
     <p:sldId id="267" r:id="rId5"/>
     <p:sldId id="279" r:id="rId6"/>
-    <p:sldId id="286" r:id="rId7"/>
-    <p:sldId id="277" r:id="rId8"/>
+    <p:sldId id="287" r:id="rId7"/>
+    <p:sldId id="288" r:id="rId8"/>
+    <p:sldId id="289" r:id="rId9"/>
+    <p:sldId id="290" r:id="rId10"/>
+    <p:sldId id="291" r:id="rId11"/>
+    <p:sldId id="286" r:id="rId12"/>
+    <p:sldId id="277" r:id="rId13"/>
   </p:sldIdLst>
   <p:sldSz cx="9144000" cy="6858000" type="screen4x3"/>
   <p:notesSz cx="6858000" cy="9144000"/>
   <p:embeddedFontLst>
     <p:embeddedFont>
       <p:font typeface="Acumin Pro Condensed Semibold" panose="020B0706020202020204" pitchFamily="34" charset="77"/>
-      <p:regular r:id="rId10"/>
-      <p:bold r:id="rId11"/>
-      <p:italic r:id="rId12"/>
-      <p:boldItalic r:id="rId13"/>
+      <p:regular r:id="rId15"/>
+      <p:bold r:id="rId16"/>
+      <p:italic r:id="rId17"/>
+      <p:boldItalic r:id="rId18"/>
     </p:embeddedFont>
     <p:embeddedFont>
       <p:font typeface="Acumin Pro Medium" panose="020B0604020202020204" pitchFamily="34" charset="77"/>
-      <p:regular r:id="rId14"/>
-      <p:italic r:id="rId15"/>
+      <p:regular r:id="rId19"/>
+      <p:italic r:id="rId20"/>
     </p:embeddedFont>
     <p:embeddedFont>
       <p:font typeface="Franklin Gothic Book" panose="020B0503020102020204" pitchFamily="34" charset="0"/>
-      <p:regular r:id="rId16"/>
-      <p:italic r:id="rId17"/>
+      <p:regular r:id="rId21"/>
+      <p:italic r:id="rId22"/>
     </p:embeddedFont>
     <p:embeddedFont>
       <p:font typeface="Franklin Gothic Medium" panose="020B0603020102020204" pitchFamily="34" charset="0"/>
-      <p:regular r:id="rId18"/>
-      <p:italic r:id="rId19"/>
+      <p:regular r:id="rId23"/>
+      <p:italic r:id="rId24"/>
     </p:embeddedFont>
     <p:embeddedFont>
       <p:font typeface="Franklin Gothic Medium Cond" panose="020B0606030402020204" pitchFamily="34" charset="0"/>
-      <p:regular r:id="rId20"/>
+      <p:regular r:id="rId25"/>
     </p:embeddedFont>
   </p:embeddedFontLst>
   <p:defaultTextStyle>
@@ -245,7 +250,7 @@
           <a:p>
             <a:fld id="{01926CF7-48D8-2F46-AFC8-8A5D2298DFDD}" type="datetimeFigureOut">
               <a:rPr lang="en-US" smtClean="0"/>
-              <a:t>4/27/26</a:t>
+              <a:t>5/11/26</a:t>
             </a:fld>
             <a:endParaRPr lang="en-US"/>
           </a:p>
@@ -545,6 +550,13 @@
             <a:ext cx="4114800" cy="3086100"/>
           </a:xfrm>
         </p:spPr>
+        <p:txBody>
+          <a:bodyPr/>
+          <a:lstStyle/>
+          <a:p>
+            <a:endParaRPr lang="en-US"/>
+          </a:p>
+        </p:txBody>
       </p:sp>
       <p:sp>
         <p:nvSpPr>
@@ -629,6 +641,13 @@
           </p:nvPr>
         </p:nvSpPr>
         <p:spPr/>
+        <p:txBody>
+          <a:bodyPr/>
+          <a:lstStyle/>
+          <a:p>
+            <a:endParaRPr lang="en-US"/>
+          </a:p>
+        </p:txBody>
       </p:sp>
       <p:sp>
         <p:nvSpPr>
@@ -13707,7 +13726,7 @@
           <a:p>
             <a:r>
               <a:rPr lang="en-US" dirty="0"/>
-              <a:t>Weekly Progress</a:t>
+              <a:t>Weekly Progress!</a:t>
             </a:r>
           </a:p>
         </p:txBody>
@@ -13739,7 +13758,7 @@
             </a:pPr>
             <a:r>
               <a:rPr lang="en-US" dirty="0"/>
-              <a:t>Sensor Updates</a:t>
+              <a:t>Paper Updates</a:t>
             </a:r>
           </a:p>
           <a:p>
@@ -13749,7 +13768,17 @@
             </a:pPr>
             <a:r>
               <a:rPr lang="en-US" dirty="0"/>
-              <a:t>New temperature sensor ordered</a:t>
+              <a:t>Paper Submitted</a:t>
+            </a:r>
+          </a:p>
+          <a:p>
+            <a:pPr marL="628650" lvl="1" indent="-285750">
+              <a:buFont typeface="Arial" panose="020B0604020202020204" pitchFamily="34" charset="0"/>
+              <a:buChar char="•"/>
+            </a:pPr>
+            <a:r>
+              <a:rPr lang="en-US" dirty="0"/>
+              <a:t>Paper Revisions (If necessary) Version 1</a:t>
             </a:r>
           </a:p>
           <a:p>
@@ -13759,7 +13788,7 @@
             </a:pPr>
             <a:r>
               <a:rPr lang="en-US" dirty="0"/>
-              <a:t>Data Storage Updates</a:t>
+              <a:t>PCB Updates</a:t>
             </a:r>
           </a:p>
           <a:p>
@@ -13769,7 +13798,7 @@
             </a:pPr>
             <a:r>
               <a:rPr lang="en-US" dirty="0"/>
-              <a:t>Medium approach explored</a:t>
+              <a:t>Switch over to P1110B with NDA Issues</a:t>
             </a:r>
           </a:p>
           <a:p>
@@ -13779,7 +13808,7 @@
             </a:pPr>
             <a:r>
               <a:rPr lang="en-US" dirty="0"/>
-              <a:t>Paper Updates</a:t>
+              <a:t>Summer Updates</a:t>
             </a:r>
           </a:p>
           <a:p>
@@ -13789,7 +13818,17 @@
             </a:pPr>
             <a:r>
               <a:rPr lang="en-US" dirty="0"/>
-              <a:t>Paper submitted and waiting on response</a:t>
+              <a:t>Summer Calendar created</a:t>
+            </a:r>
+          </a:p>
+          <a:p>
+            <a:pPr marL="628650" lvl="1" indent="-285750">
+              <a:buFont typeface="Arial" panose="020B0604020202020204" pitchFamily="34" charset="0"/>
+              <a:buChar char="•"/>
+            </a:pPr>
+            <a:r>
+              <a:rPr lang="en-US" dirty="0"/>
+              <a:t>Work for summer outlined</a:t>
             </a:r>
           </a:p>
           <a:p>
@@ -13931,7 +13970,7 @@
           <p:cNvPr id="2" name="Text Placeholder 1">
             <a:extLst>
               <a:ext uri="{FF2B5EF4-FFF2-40B4-BE49-F238E27FC236}">
-                <a16:creationId xmlns:a16="http://schemas.microsoft.com/office/drawing/2014/main" id="{0CD72587-DF24-E361-3C87-CFAE3C408C3A}"/>
+                <a16:creationId xmlns:a16="http://schemas.microsoft.com/office/drawing/2014/main" id="{0B55F92D-8E22-6CA2-89ED-C7F7DD5CF810}"/>
               </a:ext>
             </a:extLst>
           </p:cNvPr>
@@ -13949,7 +13988,7 @@
           <a:p>
             <a:r>
               <a:rPr lang="en-US" dirty="0"/>
-              <a:t>Next Week’s Plan</a:t>
+              <a:t>Paper Submitted!</a:t>
             </a:r>
           </a:p>
         </p:txBody>
@@ -13959,7 +13998,7 @@
           <p:cNvPr id="3" name="Text Placeholder 2">
             <a:extLst>
               <a:ext uri="{FF2B5EF4-FFF2-40B4-BE49-F238E27FC236}">
-                <a16:creationId xmlns:a16="http://schemas.microsoft.com/office/drawing/2014/main" id="{54C18513-FBE2-EBBB-125E-FA48BA6B1BEC}"/>
+                <a16:creationId xmlns:a16="http://schemas.microsoft.com/office/drawing/2014/main" id="{D8B3A95D-39C4-0805-F345-ECE7A3650B35}"/>
               </a:ext>
             </a:extLst>
           </p:cNvPr>
@@ -13981,8 +14020,1022 @@
             </a:pPr>
             <a:r>
               <a:rPr lang="en-US" dirty="0"/>
-              <a:t>H</a:t>
-            </a:r>
+              <a:t>Submission went through for IEEE Sensors on May 4</a:t>
+            </a:r>
+            <a:r>
+              <a:rPr lang="en-US" baseline="30000" dirty="0"/>
+              <a:t>th</a:t>
+            </a:r>
+          </a:p>
+          <a:p>
+            <a:pPr marL="285750" indent="-285750">
+              <a:buFont typeface="Arial" panose="020B0604020202020204" pitchFamily="34" charset="0"/>
+              <a:buChar char="•"/>
+            </a:pPr>
+            <a:r>
+              <a:rPr lang="en-US" dirty="0"/>
+              <a:t>Notification of Paper Acceptance: August 9th</a:t>
+            </a:r>
+          </a:p>
+          <a:p>
+            <a:pPr marL="285750" indent="-285750">
+              <a:buFont typeface="Arial" panose="020B0604020202020204" pitchFamily="34" charset="0"/>
+              <a:buChar char="•"/>
+            </a:pPr>
+            <a:endParaRPr lang="en-US" dirty="0"/>
+          </a:p>
+        </p:txBody>
+      </p:sp>
+      <p:sp>
+        <p:nvSpPr>
+          <p:cNvPr id="4" name="Title 3">
+            <a:extLst>
+              <a:ext uri="{FF2B5EF4-FFF2-40B4-BE49-F238E27FC236}">
+                <a16:creationId xmlns:a16="http://schemas.microsoft.com/office/drawing/2014/main" id="{257D4FA0-845F-9861-4A86-7C8FFCFC8416}"/>
+              </a:ext>
+            </a:extLst>
+          </p:cNvPr>
+          <p:cNvSpPr>
+            <a:spLocks noGrp="1"/>
+          </p:cNvSpPr>
+          <p:nvPr>
+            <p:ph type="title"/>
+          </p:nvPr>
+        </p:nvSpPr>
+        <p:spPr/>
+        <p:txBody>
+          <a:bodyPr/>
+          <a:lstStyle/>
+          <a:p>
+            <a:r>
+              <a:rPr lang="en-US" dirty="0"/>
+              <a:t>Paper Updates</a:t>
+            </a:r>
+          </a:p>
+        </p:txBody>
+      </p:sp>
+      <p:sp>
+        <p:nvSpPr>
+          <p:cNvPr id="5" name="Footer Placeholder 4">
+            <a:extLst>
+              <a:ext uri="{FF2B5EF4-FFF2-40B4-BE49-F238E27FC236}">
+                <a16:creationId xmlns:a16="http://schemas.microsoft.com/office/drawing/2014/main" id="{1205AE02-26A9-FFFF-498A-CAEA3D5BEABF}"/>
+              </a:ext>
+            </a:extLst>
+          </p:cNvPr>
+          <p:cNvSpPr>
+            <a:spLocks noGrp="1"/>
+          </p:cNvSpPr>
+          <p:nvPr>
+            <p:ph type="ftr" sz="quarter" idx="12"/>
+          </p:nvPr>
+        </p:nvSpPr>
+        <p:spPr/>
+        <p:txBody>
+          <a:bodyPr/>
+          <a:lstStyle/>
+          <a:p>
+            <a:pPr algn="r"/>
+            <a:r>
+              <a:rPr lang="en-US"/>
+              <a:t>3/31/23            ‹#›</a:t>
+            </a:r>
+            <a:endParaRPr lang="en-US" dirty="0"/>
+          </a:p>
+        </p:txBody>
+      </p:sp>
+      <p:pic>
+        <p:nvPicPr>
+          <p:cNvPr id="9" name="Picture 8">
+            <a:extLst>
+              <a:ext uri="{FF2B5EF4-FFF2-40B4-BE49-F238E27FC236}">
+                <a16:creationId xmlns:a16="http://schemas.microsoft.com/office/drawing/2014/main" id="{BE5E6123-3717-9E35-C6C3-3EF97A090B25}"/>
+              </a:ext>
+            </a:extLst>
+          </p:cNvPr>
+          <p:cNvPicPr>
+            <a:picLocks noChangeAspect="1"/>
+          </p:cNvPicPr>
+          <p:nvPr/>
+        </p:nvPicPr>
+        <p:blipFill>
+          <a:blip r:embed="rId2"/>
+          <a:stretch>
+            <a:fillRect/>
+          </a:stretch>
+        </p:blipFill>
+        <p:spPr>
+          <a:xfrm>
+            <a:off x="554636" y="2906767"/>
+            <a:ext cx="7772400" cy="2748075"/>
+          </a:xfrm>
+          <a:prstGeom prst="rect">
+            <a:avLst/>
+          </a:prstGeom>
+        </p:spPr>
+      </p:pic>
+    </p:spTree>
+    <p:extLst>
+      <p:ext uri="{BB962C8B-B14F-4D97-AF65-F5344CB8AC3E}">
+        <p14:creationId xmlns:p14="http://schemas.microsoft.com/office/powerpoint/2010/main" val="2964078218"/>
+      </p:ext>
+    </p:extLst>
+  </p:cSld>
+  <p:clrMapOvr>
+    <a:masterClrMapping/>
+  </p:clrMapOvr>
+</p:sld>
+</file>
+
+<file path=ppt/slides/slide4.xml><?xml version="1.0" encoding="utf-8"?>
+<p:sld xmlns:a="http://schemas.openxmlformats.org/drawingml/2006/main" xmlns:r="http://schemas.openxmlformats.org/officeDocument/2006/relationships" xmlns:p="http://schemas.openxmlformats.org/presentationml/2006/main">
+  <p:cSld>
+    <p:spTree>
+      <p:nvGrpSpPr>
+        <p:cNvPr id="1" name="">
+          <a:extLst>
+            <a:ext uri="{FF2B5EF4-FFF2-40B4-BE49-F238E27FC236}">
+              <a16:creationId xmlns:a16="http://schemas.microsoft.com/office/drawing/2014/main" id="{36BEFC58-6E3D-9657-0C2C-F89588D19B21}"/>
+            </a:ext>
+          </a:extLst>
+        </p:cNvPr>
+        <p:cNvGrpSpPr/>
+        <p:nvPr/>
+      </p:nvGrpSpPr>
+      <p:grpSpPr>
+        <a:xfrm>
+          <a:off x="0" y="0"/>
+          <a:ext cx="0" cy="0"/>
+          <a:chOff x="0" y="0"/>
+          <a:chExt cx="0" cy="0"/>
+        </a:xfrm>
+      </p:grpSpPr>
+      <p:sp>
+        <p:nvSpPr>
+          <p:cNvPr id="2" name="Text Placeholder 1">
+            <a:extLst>
+              <a:ext uri="{FF2B5EF4-FFF2-40B4-BE49-F238E27FC236}">
+                <a16:creationId xmlns:a16="http://schemas.microsoft.com/office/drawing/2014/main" id="{04B41760-6972-BEF4-EFC0-74797874A745}"/>
+              </a:ext>
+            </a:extLst>
+          </p:cNvPr>
+          <p:cNvSpPr>
+            <a:spLocks noGrp="1"/>
+          </p:cNvSpPr>
+          <p:nvPr>
+            <p:ph type="body" sz="quarter" idx="11"/>
+          </p:nvPr>
+        </p:nvSpPr>
+        <p:spPr/>
+        <p:txBody>
+          <a:bodyPr/>
+          <a:lstStyle/>
+          <a:p>
+            <a:r>
+              <a:rPr lang="en-US" dirty="0"/>
+              <a:t>Paper Revisions (if necessary) Version 1</a:t>
+            </a:r>
+          </a:p>
+        </p:txBody>
+      </p:sp>
+      <p:sp>
+        <p:nvSpPr>
+          <p:cNvPr id="3" name="Text Placeholder 2">
+            <a:extLst>
+              <a:ext uri="{FF2B5EF4-FFF2-40B4-BE49-F238E27FC236}">
+                <a16:creationId xmlns:a16="http://schemas.microsoft.com/office/drawing/2014/main" id="{695F57F2-0C4B-9BC9-25D6-CCE91A8D93DD}"/>
+              </a:ext>
+            </a:extLst>
+          </p:cNvPr>
+          <p:cNvSpPr>
+            <a:spLocks noGrp="1"/>
+          </p:cNvSpPr>
+          <p:nvPr>
+            <p:ph type="body" sz="quarter" idx="10"/>
+          </p:nvPr>
+        </p:nvSpPr>
+        <p:spPr/>
+        <p:txBody>
+          <a:bodyPr/>
+          <a:lstStyle/>
+          <a:p>
+            <a:pPr marL="285750" indent="-285750">
+              <a:buFont typeface="Arial" panose="020B0604020202020204" pitchFamily="34" charset="0"/>
+              <a:buChar char="•"/>
+            </a:pPr>
+            <a:r>
+              <a:rPr lang="en-US" dirty="0"/>
+              <a:t>Paper edits cannot be made currently</a:t>
+            </a:r>
+          </a:p>
+          <a:p>
+            <a:pPr marL="285750" indent="-285750">
+              <a:buFont typeface="Arial" panose="020B0604020202020204" pitchFamily="34" charset="0"/>
+              <a:buChar char="•"/>
+            </a:pPr>
+            <a:r>
+              <a:rPr lang="en-US" dirty="0"/>
+              <a:t>Still have revisions I would like to make</a:t>
+            </a:r>
+          </a:p>
+          <a:p>
+            <a:pPr marL="628650" lvl="1" indent="-285750">
+              <a:buFont typeface="Arial" panose="020B0604020202020204" pitchFamily="34" charset="0"/>
+              <a:buChar char="•"/>
+            </a:pPr>
+            <a:r>
+              <a:rPr lang="en-US" dirty="0" err="1"/>
+              <a:t>Draw.io</a:t>
+            </a:r>
+            <a:r>
+              <a:rPr lang="en-US" dirty="0"/>
+              <a:t> diagrams for circuits to emphasize clarity</a:t>
+            </a:r>
+          </a:p>
+          <a:p>
+            <a:pPr marL="628650" lvl="1" indent="-285750">
+              <a:buFont typeface="Arial" panose="020B0604020202020204" pitchFamily="34" charset="0"/>
+              <a:buChar char="•"/>
+            </a:pPr>
+            <a:r>
+              <a:rPr lang="en-US" dirty="0"/>
+              <a:t>Adding </a:t>
+            </a:r>
+            <a:r>
+              <a:rPr lang="en-US" dirty="0" err="1"/>
+              <a:t>OrCID</a:t>
+            </a:r>
+            <a:endParaRPr lang="en-US" dirty="0"/>
+          </a:p>
+          <a:p>
+            <a:pPr marL="628650" lvl="1" indent="-285750">
+              <a:buFont typeface="Arial" panose="020B0604020202020204" pitchFamily="34" charset="0"/>
+              <a:buChar char="•"/>
+            </a:pPr>
+            <a:r>
+              <a:rPr lang="en-US" dirty="0"/>
+              <a:t>More detail on results</a:t>
+            </a:r>
+          </a:p>
+        </p:txBody>
+      </p:sp>
+      <p:sp>
+        <p:nvSpPr>
+          <p:cNvPr id="4" name="Title 3">
+            <a:extLst>
+              <a:ext uri="{FF2B5EF4-FFF2-40B4-BE49-F238E27FC236}">
+                <a16:creationId xmlns:a16="http://schemas.microsoft.com/office/drawing/2014/main" id="{8BCEE9AE-86F7-C315-FF71-5687B255CBED}"/>
+              </a:ext>
+            </a:extLst>
+          </p:cNvPr>
+          <p:cNvSpPr>
+            <a:spLocks noGrp="1"/>
+          </p:cNvSpPr>
+          <p:nvPr>
+            <p:ph type="title"/>
+          </p:nvPr>
+        </p:nvSpPr>
+        <p:spPr/>
+        <p:txBody>
+          <a:bodyPr/>
+          <a:lstStyle/>
+          <a:p>
+            <a:r>
+              <a:rPr lang="en-US" dirty="0"/>
+              <a:t>Paper Updates</a:t>
+            </a:r>
+          </a:p>
+        </p:txBody>
+      </p:sp>
+      <p:sp>
+        <p:nvSpPr>
+          <p:cNvPr id="5" name="Footer Placeholder 4">
+            <a:extLst>
+              <a:ext uri="{FF2B5EF4-FFF2-40B4-BE49-F238E27FC236}">
+                <a16:creationId xmlns:a16="http://schemas.microsoft.com/office/drawing/2014/main" id="{FF7C90DD-F8E1-A2AA-55E0-898C0C471D7B}"/>
+              </a:ext>
+            </a:extLst>
+          </p:cNvPr>
+          <p:cNvSpPr>
+            <a:spLocks noGrp="1"/>
+          </p:cNvSpPr>
+          <p:nvPr>
+            <p:ph type="ftr" sz="quarter" idx="12"/>
+          </p:nvPr>
+        </p:nvSpPr>
+        <p:spPr/>
+        <p:txBody>
+          <a:bodyPr/>
+          <a:lstStyle/>
+          <a:p>
+            <a:pPr algn="r"/>
+            <a:r>
+              <a:rPr lang="en-US"/>
+              <a:t>3/31/23            ‹#›</a:t>
+            </a:r>
+            <a:endParaRPr lang="en-US" dirty="0"/>
+          </a:p>
+        </p:txBody>
+      </p:sp>
+    </p:spTree>
+    <p:extLst>
+      <p:ext uri="{BB962C8B-B14F-4D97-AF65-F5344CB8AC3E}">
+        <p14:creationId xmlns:p14="http://schemas.microsoft.com/office/powerpoint/2010/main" val="2686482182"/>
+      </p:ext>
+    </p:extLst>
+  </p:cSld>
+  <p:clrMapOvr>
+    <a:masterClrMapping/>
+  </p:clrMapOvr>
+</p:sld>
+</file>
+
+<file path=ppt/slides/slide5.xml><?xml version="1.0" encoding="utf-8"?>
+<p:sld xmlns:a="http://schemas.openxmlformats.org/drawingml/2006/main" xmlns:r="http://schemas.openxmlformats.org/officeDocument/2006/relationships" xmlns:p="http://schemas.openxmlformats.org/presentationml/2006/main">
+  <p:cSld>
+    <p:spTree>
+      <p:nvGrpSpPr>
+        <p:cNvPr id="1" name=""/>
+        <p:cNvGrpSpPr/>
+        <p:nvPr/>
+      </p:nvGrpSpPr>
+      <p:grpSpPr>
+        <a:xfrm>
+          <a:off x="0" y="0"/>
+          <a:ext cx="0" cy="0"/>
+          <a:chOff x="0" y="0"/>
+          <a:chExt cx="0" cy="0"/>
+        </a:xfrm>
+      </p:grpSpPr>
+      <p:sp>
+        <p:nvSpPr>
+          <p:cNvPr id="2" name="Text Placeholder 1">
+            <a:extLst>
+              <a:ext uri="{FF2B5EF4-FFF2-40B4-BE49-F238E27FC236}">
+                <a16:creationId xmlns:a16="http://schemas.microsoft.com/office/drawing/2014/main" id="{B29C9EC2-B9B1-F5AA-C73B-0329D506F329}"/>
+              </a:ext>
+            </a:extLst>
+          </p:cNvPr>
+          <p:cNvSpPr>
+            <a:spLocks noGrp="1"/>
+          </p:cNvSpPr>
+          <p:nvPr>
+            <p:ph type="body" sz="quarter" idx="11"/>
+          </p:nvPr>
+        </p:nvSpPr>
+        <p:spPr/>
+        <p:txBody>
+          <a:bodyPr/>
+          <a:lstStyle/>
+          <a:p>
+            <a:r>
+              <a:rPr lang="en-US" dirty="0"/>
+              <a:t>Switch over to P1110B with NDA Issues</a:t>
+            </a:r>
+          </a:p>
+        </p:txBody>
+      </p:sp>
+      <p:sp>
+        <p:nvSpPr>
+          <p:cNvPr id="3" name="Text Placeholder 2">
+            <a:extLst>
+              <a:ext uri="{FF2B5EF4-FFF2-40B4-BE49-F238E27FC236}">
+                <a16:creationId xmlns:a16="http://schemas.microsoft.com/office/drawing/2014/main" id="{86FD3585-3B95-520C-827F-69FEA064EACF}"/>
+              </a:ext>
+            </a:extLst>
+          </p:cNvPr>
+          <p:cNvSpPr>
+            <a:spLocks noGrp="1"/>
+          </p:cNvSpPr>
+          <p:nvPr>
+            <p:ph type="body" sz="quarter" idx="10"/>
+          </p:nvPr>
+        </p:nvSpPr>
+        <p:spPr/>
+        <p:txBody>
+          <a:bodyPr/>
+          <a:lstStyle/>
+          <a:p>
+            <a:pPr marL="285750" indent="-285750">
+              <a:buFont typeface="Arial" panose="020B0604020202020204" pitchFamily="34" charset="0"/>
+              <a:buChar char="•"/>
+            </a:pPr>
+            <a:r>
+              <a:rPr lang="en-US" dirty="0"/>
+              <a:t>NDA never returned or signed from Legal department</a:t>
+            </a:r>
+          </a:p>
+          <a:p>
+            <a:pPr marL="285750" indent="-285750">
+              <a:buFont typeface="Arial" panose="020B0604020202020204" pitchFamily="34" charset="0"/>
+              <a:buChar char="•"/>
+            </a:pPr>
+            <a:r>
+              <a:rPr lang="en-US" dirty="0"/>
+              <a:t>Switch to P1110B (No NDA required)</a:t>
+            </a:r>
+          </a:p>
+          <a:p>
+            <a:pPr marL="285750" indent="-285750">
+              <a:buFont typeface="Arial" panose="020B0604020202020204" pitchFamily="34" charset="0"/>
+              <a:buChar char="•"/>
+            </a:pPr>
+            <a:r>
+              <a:rPr lang="en-US" dirty="0"/>
+              <a:t>Much more reliable device in the end</a:t>
+            </a:r>
+          </a:p>
+        </p:txBody>
+      </p:sp>
+      <p:sp>
+        <p:nvSpPr>
+          <p:cNvPr id="4" name="Title 3">
+            <a:extLst>
+              <a:ext uri="{FF2B5EF4-FFF2-40B4-BE49-F238E27FC236}">
+                <a16:creationId xmlns:a16="http://schemas.microsoft.com/office/drawing/2014/main" id="{521F8A32-1A54-8282-0017-DD24427F76DE}"/>
+              </a:ext>
+            </a:extLst>
+          </p:cNvPr>
+          <p:cNvSpPr>
+            <a:spLocks noGrp="1"/>
+          </p:cNvSpPr>
+          <p:nvPr>
+            <p:ph type="title"/>
+          </p:nvPr>
+        </p:nvSpPr>
+        <p:spPr/>
+        <p:txBody>
+          <a:bodyPr/>
+          <a:lstStyle/>
+          <a:p>
+            <a:r>
+              <a:rPr lang="en-US" dirty="0"/>
+              <a:t>PCB Updates</a:t>
+            </a:r>
+          </a:p>
+        </p:txBody>
+      </p:sp>
+      <p:sp>
+        <p:nvSpPr>
+          <p:cNvPr id="5" name="Footer Placeholder 4">
+            <a:extLst>
+              <a:ext uri="{FF2B5EF4-FFF2-40B4-BE49-F238E27FC236}">
+                <a16:creationId xmlns:a16="http://schemas.microsoft.com/office/drawing/2014/main" id="{889FB49F-24B3-78C7-0793-249E715B704C}"/>
+              </a:ext>
+            </a:extLst>
+          </p:cNvPr>
+          <p:cNvSpPr>
+            <a:spLocks noGrp="1"/>
+          </p:cNvSpPr>
+          <p:nvPr>
+            <p:ph type="ftr" sz="quarter" idx="12"/>
+          </p:nvPr>
+        </p:nvSpPr>
+        <p:spPr/>
+        <p:txBody>
+          <a:bodyPr/>
+          <a:lstStyle/>
+          <a:p>
+            <a:pPr algn="r"/>
+            <a:r>
+              <a:rPr lang="en-US"/>
+              <a:t>3/31/23            ‹#›</a:t>
+            </a:r>
+            <a:endParaRPr lang="en-US" dirty="0"/>
+          </a:p>
+        </p:txBody>
+      </p:sp>
+      <p:pic>
+        <p:nvPicPr>
+          <p:cNvPr id="6" name="Picture 5">
+            <a:extLst>
+              <a:ext uri="{FF2B5EF4-FFF2-40B4-BE49-F238E27FC236}">
+                <a16:creationId xmlns:a16="http://schemas.microsoft.com/office/drawing/2014/main" id="{7D4CE899-C16F-18A4-D8B4-38C1F0BB3207}"/>
+              </a:ext>
+            </a:extLst>
+          </p:cNvPr>
+          <p:cNvPicPr>
+            <a:picLocks noChangeAspect="1"/>
+          </p:cNvPicPr>
+          <p:nvPr/>
+        </p:nvPicPr>
+        <p:blipFill>
+          <a:blip r:embed="rId2"/>
+          <a:stretch>
+            <a:fillRect/>
+          </a:stretch>
+        </p:blipFill>
+        <p:spPr>
+          <a:xfrm>
+            <a:off x="4313879" y="2496386"/>
+            <a:ext cx="3817257" cy="3028113"/>
+          </a:xfrm>
+          <a:prstGeom prst="rect">
+            <a:avLst/>
+          </a:prstGeom>
+        </p:spPr>
+      </p:pic>
+    </p:spTree>
+    <p:extLst>
+      <p:ext uri="{BB962C8B-B14F-4D97-AF65-F5344CB8AC3E}">
+        <p14:creationId xmlns:p14="http://schemas.microsoft.com/office/powerpoint/2010/main" val="3437462689"/>
+      </p:ext>
+    </p:extLst>
+  </p:cSld>
+  <p:clrMapOvr>
+    <a:masterClrMapping/>
+  </p:clrMapOvr>
+</p:sld>
+</file>
+
+<file path=ppt/slides/slide6.xml><?xml version="1.0" encoding="utf-8"?>
+<p:sld xmlns:a="http://schemas.openxmlformats.org/drawingml/2006/main" xmlns:r="http://schemas.openxmlformats.org/officeDocument/2006/relationships" xmlns:p="http://schemas.openxmlformats.org/presentationml/2006/main">
+  <p:cSld>
+    <p:spTree>
+      <p:nvGrpSpPr>
+        <p:cNvPr id="1" name=""/>
+        <p:cNvGrpSpPr/>
+        <p:nvPr/>
+      </p:nvGrpSpPr>
+      <p:grpSpPr>
+        <a:xfrm>
+          <a:off x="0" y="0"/>
+          <a:ext cx="0" cy="0"/>
+          <a:chOff x="0" y="0"/>
+          <a:chExt cx="0" cy="0"/>
+        </a:xfrm>
+      </p:grpSpPr>
+      <p:sp>
+        <p:nvSpPr>
+          <p:cNvPr id="2" name="Text Placeholder 1">
+            <a:extLst>
+              <a:ext uri="{FF2B5EF4-FFF2-40B4-BE49-F238E27FC236}">
+                <a16:creationId xmlns:a16="http://schemas.microsoft.com/office/drawing/2014/main" id="{6AC04910-8F9F-97E3-4EBF-6C4813123975}"/>
+              </a:ext>
+            </a:extLst>
+          </p:cNvPr>
+          <p:cNvSpPr>
+            <a:spLocks noGrp="1"/>
+          </p:cNvSpPr>
+          <p:nvPr>
+            <p:ph type="body" sz="quarter" idx="11"/>
+          </p:nvPr>
+        </p:nvSpPr>
+        <p:spPr/>
+        <p:txBody>
+          <a:bodyPr/>
+          <a:lstStyle/>
+          <a:p>
+            <a:r>
+              <a:rPr lang="en-US" dirty="0"/>
+              <a:t>Summer Calendar created</a:t>
+            </a:r>
+          </a:p>
+          <a:p>
+            <a:endParaRPr lang="en-US" dirty="0"/>
+          </a:p>
+        </p:txBody>
+      </p:sp>
+      <p:sp>
+        <p:nvSpPr>
+          <p:cNvPr id="3" name="Text Placeholder 2">
+            <a:extLst>
+              <a:ext uri="{FF2B5EF4-FFF2-40B4-BE49-F238E27FC236}">
+                <a16:creationId xmlns:a16="http://schemas.microsoft.com/office/drawing/2014/main" id="{F757AD92-CBB4-EAC9-1F9B-34904F091BBE}"/>
+              </a:ext>
+            </a:extLst>
+          </p:cNvPr>
+          <p:cNvSpPr>
+            <a:spLocks noGrp="1"/>
+          </p:cNvSpPr>
+          <p:nvPr>
+            <p:ph type="body" sz="quarter" idx="10"/>
+          </p:nvPr>
+        </p:nvSpPr>
+        <p:spPr/>
+        <p:txBody>
+          <a:bodyPr/>
+          <a:lstStyle/>
+          <a:p>
+            <a:pPr marL="285750" indent="-285750">
+              <a:buFont typeface="Arial" panose="020B0604020202020204" pitchFamily="34" charset="0"/>
+              <a:buChar char="•"/>
+            </a:pPr>
+            <a:r>
+              <a:rPr lang="en-US" dirty="0"/>
+              <a:t>Asked </a:t>
+            </a:r>
+            <a:r>
+              <a:rPr lang="en-US" dirty="0" err="1"/>
+              <a:t>Niedra</a:t>
+            </a:r>
+            <a:r>
+              <a:rPr lang="en-US" dirty="0"/>
+              <a:t> for Summer Calendar</a:t>
+            </a:r>
+          </a:p>
+          <a:p>
+            <a:pPr marL="285750" indent="-285750">
+              <a:buFont typeface="Arial" panose="020B0604020202020204" pitchFamily="34" charset="0"/>
+              <a:buChar char="•"/>
+            </a:pPr>
+            <a:r>
+              <a:rPr lang="en-US" dirty="0"/>
+              <a:t>Told me it will act as “offer letter”</a:t>
+            </a:r>
+          </a:p>
+          <a:p>
+            <a:pPr marL="285750" indent="-285750">
+              <a:buFont typeface="Arial" panose="020B0604020202020204" pitchFamily="34" charset="0"/>
+              <a:buChar char="•"/>
+            </a:pPr>
+            <a:r>
+              <a:rPr lang="en-US" dirty="0"/>
+              <a:t>Relevant sections filled out</a:t>
+            </a:r>
+          </a:p>
+        </p:txBody>
+      </p:sp>
+      <p:sp>
+        <p:nvSpPr>
+          <p:cNvPr id="4" name="Title 3">
+            <a:extLst>
+              <a:ext uri="{FF2B5EF4-FFF2-40B4-BE49-F238E27FC236}">
+                <a16:creationId xmlns:a16="http://schemas.microsoft.com/office/drawing/2014/main" id="{4FA66B85-1F3C-B83F-90DA-ADA59B4505AC}"/>
+              </a:ext>
+            </a:extLst>
+          </p:cNvPr>
+          <p:cNvSpPr>
+            <a:spLocks noGrp="1"/>
+          </p:cNvSpPr>
+          <p:nvPr>
+            <p:ph type="title"/>
+          </p:nvPr>
+        </p:nvSpPr>
+        <p:spPr/>
+        <p:txBody>
+          <a:bodyPr/>
+          <a:lstStyle/>
+          <a:p>
+            <a:r>
+              <a:rPr lang="en-US" dirty="0"/>
+              <a:t>Summer Updates</a:t>
+            </a:r>
+          </a:p>
+        </p:txBody>
+      </p:sp>
+      <p:sp>
+        <p:nvSpPr>
+          <p:cNvPr id="5" name="Footer Placeholder 4">
+            <a:extLst>
+              <a:ext uri="{FF2B5EF4-FFF2-40B4-BE49-F238E27FC236}">
+                <a16:creationId xmlns:a16="http://schemas.microsoft.com/office/drawing/2014/main" id="{0CB7DCB6-88D5-8802-4BBD-8991C4F81BC8}"/>
+              </a:ext>
+            </a:extLst>
+          </p:cNvPr>
+          <p:cNvSpPr>
+            <a:spLocks noGrp="1"/>
+          </p:cNvSpPr>
+          <p:nvPr>
+            <p:ph type="ftr" sz="quarter" idx="12"/>
+          </p:nvPr>
+        </p:nvSpPr>
+        <p:spPr/>
+        <p:txBody>
+          <a:bodyPr/>
+          <a:lstStyle/>
+          <a:p>
+            <a:pPr algn="r"/>
+            <a:r>
+              <a:rPr lang="en-US"/>
+              <a:t>3/31/23            ‹#›</a:t>
+            </a:r>
+            <a:endParaRPr lang="en-US" dirty="0"/>
+          </a:p>
+        </p:txBody>
+      </p:sp>
+      <p:pic>
+        <p:nvPicPr>
+          <p:cNvPr id="7" name="Picture 6">
+            <a:extLst>
+              <a:ext uri="{FF2B5EF4-FFF2-40B4-BE49-F238E27FC236}">
+                <a16:creationId xmlns:a16="http://schemas.microsoft.com/office/drawing/2014/main" id="{08757880-116A-F2DE-03F1-6CB50ED75132}"/>
+              </a:ext>
+            </a:extLst>
+          </p:cNvPr>
+          <p:cNvPicPr>
+            <a:picLocks noChangeAspect="1"/>
+          </p:cNvPicPr>
+          <p:nvPr/>
+        </p:nvPicPr>
+        <p:blipFill>
+          <a:blip r:embed="rId2"/>
+          <a:stretch>
+            <a:fillRect/>
+          </a:stretch>
+        </p:blipFill>
+        <p:spPr>
+          <a:xfrm>
+            <a:off x="3461620" y="2668249"/>
+            <a:ext cx="4869580" cy="3336278"/>
+          </a:xfrm>
+          <a:prstGeom prst="rect">
+            <a:avLst/>
+          </a:prstGeom>
+        </p:spPr>
+      </p:pic>
+    </p:spTree>
+    <p:extLst>
+      <p:ext uri="{BB962C8B-B14F-4D97-AF65-F5344CB8AC3E}">
+        <p14:creationId xmlns:p14="http://schemas.microsoft.com/office/powerpoint/2010/main" val="3016960350"/>
+      </p:ext>
+    </p:extLst>
+  </p:cSld>
+  <p:clrMapOvr>
+    <a:masterClrMapping/>
+  </p:clrMapOvr>
+</p:sld>
+</file>
+
+<file path=ppt/slides/slide7.xml><?xml version="1.0" encoding="utf-8"?>
+<p:sld xmlns:a="http://schemas.openxmlformats.org/drawingml/2006/main" xmlns:r="http://schemas.openxmlformats.org/officeDocument/2006/relationships" xmlns:p="http://schemas.openxmlformats.org/presentationml/2006/main">
+  <p:cSld>
+    <p:spTree>
+      <p:nvGrpSpPr>
+        <p:cNvPr id="1" name=""/>
+        <p:cNvGrpSpPr/>
+        <p:nvPr/>
+      </p:nvGrpSpPr>
+      <p:grpSpPr>
+        <a:xfrm>
+          <a:off x="0" y="0"/>
+          <a:ext cx="0" cy="0"/>
+          <a:chOff x="0" y="0"/>
+          <a:chExt cx="0" cy="0"/>
+        </a:xfrm>
+      </p:grpSpPr>
+      <p:sp>
+        <p:nvSpPr>
+          <p:cNvPr id="2" name="Text Placeholder 1">
+            <a:extLst>
+              <a:ext uri="{FF2B5EF4-FFF2-40B4-BE49-F238E27FC236}">
+                <a16:creationId xmlns:a16="http://schemas.microsoft.com/office/drawing/2014/main" id="{A7344A2F-6F8F-4ACB-1D3F-5281D65B4821}"/>
+              </a:ext>
+            </a:extLst>
+          </p:cNvPr>
+          <p:cNvSpPr>
+            <a:spLocks noGrp="1"/>
+          </p:cNvSpPr>
+          <p:nvPr>
+            <p:ph type="body" sz="quarter" idx="11"/>
+          </p:nvPr>
+        </p:nvSpPr>
+        <p:spPr/>
+        <p:txBody>
+          <a:bodyPr/>
+          <a:lstStyle/>
+          <a:p>
+            <a:r>
+              <a:rPr lang="en-US" dirty="0"/>
+              <a:t>Work for Summer Outlined</a:t>
+            </a:r>
+          </a:p>
+        </p:txBody>
+      </p:sp>
+      <p:sp>
+        <p:nvSpPr>
+          <p:cNvPr id="3" name="Text Placeholder 2">
+            <a:extLst>
+              <a:ext uri="{FF2B5EF4-FFF2-40B4-BE49-F238E27FC236}">
+                <a16:creationId xmlns:a16="http://schemas.microsoft.com/office/drawing/2014/main" id="{9B4551A6-A1F1-8860-9ECB-FDF3EF075856}"/>
+              </a:ext>
+            </a:extLst>
+          </p:cNvPr>
+          <p:cNvSpPr>
+            <a:spLocks noGrp="1"/>
+          </p:cNvSpPr>
+          <p:nvPr>
+            <p:ph type="body" sz="quarter" idx="10"/>
+          </p:nvPr>
+        </p:nvSpPr>
+        <p:spPr/>
+        <p:txBody>
+          <a:bodyPr/>
+          <a:lstStyle/>
+          <a:p>
+            <a:pPr marL="285750" indent="-285750">
+              <a:buFont typeface="Arial" panose="020B0604020202020204" pitchFamily="34" charset="0"/>
+              <a:buChar char="•"/>
+            </a:pPr>
+            <a:r>
+              <a:rPr lang="en-US" b="1" dirty="0"/>
+              <a:t>Explore all 3 options of data collection storage as outlined previously</a:t>
+            </a:r>
+          </a:p>
+          <a:p>
+            <a:pPr marL="285750" indent="-285750">
+              <a:buFont typeface="Arial" panose="020B0604020202020204" pitchFamily="34" charset="0"/>
+              <a:buChar char="•"/>
+            </a:pPr>
+            <a:r>
+              <a:rPr lang="en-US" dirty="0"/>
+              <a:t>Design and fabricate a two new versions of the PCB:</a:t>
+            </a:r>
+          </a:p>
+          <a:p>
+            <a:pPr marL="628650" lvl="1" indent="-285750">
+              <a:buFont typeface="Arial" panose="020B0604020202020204" pitchFamily="34" charset="0"/>
+              <a:buChar char="•"/>
+            </a:pPr>
+            <a:r>
+              <a:rPr lang="en-US" dirty="0"/>
+              <a:t>Smaller without RFID -&gt; DC conversion</a:t>
+            </a:r>
+          </a:p>
+          <a:p>
+            <a:pPr marL="628650" lvl="1" indent="-285750">
+              <a:buFont typeface="Arial" panose="020B0604020202020204" pitchFamily="34" charset="0"/>
+              <a:buChar char="•"/>
+            </a:pPr>
+            <a:r>
+              <a:rPr lang="en-US" dirty="0"/>
+              <a:t>Larger with RFID -&gt; DC conversion</a:t>
+            </a:r>
+          </a:p>
+          <a:p>
+            <a:pPr marL="285750" indent="-285750">
+              <a:buFont typeface="Arial" panose="020B0604020202020204" pitchFamily="34" charset="0"/>
+              <a:buChar char="•"/>
+            </a:pPr>
+            <a:r>
+              <a:rPr lang="en-US" dirty="0"/>
+              <a:t>Expanding the data collection capabilities</a:t>
+            </a:r>
+          </a:p>
+        </p:txBody>
+      </p:sp>
+      <p:sp>
+        <p:nvSpPr>
+          <p:cNvPr id="4" name="Title 3">
+            <a:extLst>
+              <a:ext uri="{FF2B5EF4-FFF2-40B4-BE49-F238E27FC236}">
+                <a16:creationId xmlns:a16="http://schemas.microsoft.com/office/drawing/2014/main" id="{C0E18DF5-A4DE-9794-CD82-204F5EAFBEE5}"/>
+              </a:ext>
+            </a:extLst>
+          </p:cNvPr>
+          <p:cNvSpPr>
+            <a:spLocks noGrp="1"/>
+          </p:cNvSpPr>
+          <p:nvPr>
+            <p:ph type="title"/>
+          </p:nvPr>
+        </p:nvSpPr>
+        <p:spPr/>
+        <p:txBody>
+          <a:bodyPr/>
+          <a:lstStyle/>
+          <a:p>
+            <a:r>
+              <a:rPr lang="en-US" dirty="0"/>
+              <a:t>Summer Updates</a:t>
+            </a:r>
+          </a:p>
+        </p:txBody>
+      </p:sp>
+      <p:sp>
+        <p:nvSpPr>
+          <p:cNvPr id="5" name="Footer Placeholder 4">
+            <a:extLst>
+              <a:ext uri="{FF2B5EF4-FFF2-40B4-BE49-F238E27FC236}">
+                <a16:creationId xmlns:a16="http://schemas.microsoft.com/office/drawing/2014/main" id="{65925B22-BF00-38DE-88FD-396D985D6FFD}"/>
+              </a:ext>
+            </a:extLst>
+          </p:cNvPr>
+          <p:cNvSpPr>
+            <a:spLocks noGrp="1"/>
+          </p:cNvSpPr>
+          <p:nvPr>
+            <p:ph type="ftr" sz="quarter" idx="12"/>
+          </p:nvPr>
+        </p:nvSpPr>
+        <p:spPr/>
+        <p:txBody>
+          <a:bodyPr/>
+          <a:lstStyle/>
+          <a:p>
+            <a:pPr algn="r"/>
+            <a:r>
+              <a:rPr lang="en-US"/>
+              <a:t>3/31/23            ‹#›</a:t>
+            </a:r>
+            <a:endParaRPr lang="en-US" dirty="0"/>
+          </a:p>
+        </p:txBody>
+      </p:sp>
+    </p:spTree>
+    <p:extLst>
+      <p:ext uri="{BB962C8B-B14F-4D97-AF65-F5344CB8AC3E}">
+        <p14:creationId xmlns:p14="http://schemas.microsoft.com/office/powerpoint/2010/main" val="1921644133"/>
+      </p:ext>
+    </p:extLst>
+  </p:cSld>
+  <p:clrMapOvr>
+    <a:masterClrMapping/>
+  </p:clrMapOvr>
+</p:sld>
+</file>
+
+<file path=ppt/slides/slide8.xml><?xml version="1.0" encoding="utf-8"?>
+<p:sld xmlns:a="http://schemas.openxmlformats.org/drawingml/2006/main" xmlns:r="http://schemas.openxmlformats.org/officeDocument/2006/relationships" xmlns:p="http://schemas.openxmlformats.org/presentationml/2006/main">
+  <p:cSld>
+    <p:spTree>
+      <p:nvGrpSpPr>
+        <p:cNvPr id="1" name=""/>
+        <p:cNvGrpSpPr/>
+        <p:nvPr/>
+      </p:nvGrpSpPr>
+      <p:grpSpPr>
+        <a:xfrm>
+          <a:off x="0" y="0"/>
+          <a:ext cx="0" cy="0"/>
+          <a:chOff x="0" y="0"/>
+          <a:chExt cx="0" cy="0"/>
+        </a:xfrm>
+      </p:grpSpPr>
+      <p:sp>
+        <p:nvSpPr>
+          <p:cNvPr id="2" name="Text Placeholder 1">
+            <a:extLst>
+              <a:ext uri="{FF2B5EF4-FFF2-40B4-BE49-F238E27FC236}">
+                <a16:creationId xmlns:a16="http://schemas.microsoft.com/office/drawing/2014/main" id="{0CD72587-DF24-E361-3C87-CFAE3C408C3A}"/>
+              </a:ext>
+            </a:extLst>
+          </p:cNvPr>
+          <p:cNvSpPr>
+            <a:spLocks noGrp="1"/>
+          </p:cNvSpPr>
+          <p:nvPr>
+            <p:ph type="body" sz="quarter" idx="11"/>
+          </p:nvPr>
+        </p:nvSpPr>
+        <p:spPr/>
+        <p:txBody>
+          <a:bodyPr/>
+          <a:lstStyle/>
+          <a:p>
+            <a:r>
+              <a:rPr lang="en-US" dirty="0"/>
+              <a:t>Next Week’s Plan</a:t>
+            </a:r>
+          </a:p>
+        </p:txBody>
+      </p:sp>
+      <p:sp>
+        <p:nvSpPr>
+          <p:cNvPr id="3" name="Text Placeholder 2">
+            <a:extLst>
+              <a:ext uri="{FF2B5EF4-FFF2-40B4-BE49-F238E27FC236}">
+                <a16:creationId xmlns:a16="http://schemas.microsoft.com/office/drawing/2014/main" id="{54C18513-FBE2-EBBB-125E-FA48BA6B1BEC}"/>
+              </a:ext>
+            </a:extLst>
+          </p:cNvPr>
+          <p:cNvSpPr>
+            <a:spLocks noGrp="1"/>
+          </p:cNvSpPr>
+          <p:nvPr>
+            <p:ph type="body" sz="quarter" idx="10"/>
+          </p:nvPr>
+        </p:nvSpPr>
+        <p:spPr/>
+        <p:txBody>
+          <a:bodyPr/>
+          <a:lstStyle/>
+          <a:p>
+            <a:pPr marL="285750" indent="-285750">
+              <a:buFont typeface="Arial" panose="020B0604020202020204" pitchFamily="34" charset="0"/>
+              <a:buChar char="•"/>
+            </a:pPr>
+            <a:r>
+              <a:rPr lang="en-US" dirty="0"/>
+              <a:t>Implement cloud storage for data collection</a:t>
+            </a:r>
+          </a:p>
+          <a:p>
+            <a:pPr marL="285750" indent="-285750">
+              <a:buFont typeface="Arial" panose="020B0604020202020204" pitchFamily="34" charset="0"/>
+              <a:buChar char="•"/>
+            </a:pPr>
+            <a:r>
+              <a:rPr lang="en-US" dirty="0"/>
+              <a:t>Create new schematic for P1110B power harvester device</a:t>
+            </a:r>
+          </a:p>
+          <a:p>
+            <a:pPr marL="285750" indent="-285750">
+              <a:buFont typeface="Arial" panose="020B0604020202020204" pitchFamily="34" charset="0"/>
+              <a:buChar char="•"/>
+            </a:pPr>
+            <a:endParaRPr lang="en-US" dirty="0"/>
           </a:p>
         </p:txBody>
       </p:sp>
@@ -14056,7 +15109,7 @@
 </p:sld>
 </file>
 
-<file path=ppt/slides/slide4.xml><?xml version="1.0" encoding="utf-8"?>
+<file path=ppt/slides/slide9.xml><?xml version="1.0" encoding="utf-8"?>
 <p:sld xmlns:a="http://schemas.openxmlformats.org/drawingml/2006/main" xmlns:r="http://schemas.openxmlformats.org/officeDocument/2006/relationships" xmlns:p="http://schemas.openxmlformats.org/presentationml/2006/main">
   <p:cSld>
     <p:spTree>
@@ -14727,15 +15780,6 @@
 </file>
 
 <file path=customXml/item1.xml><?xml version="1.0" encoding="utf-8"?>
-<?mso-contentType ?>
-<FormTemplates xmlns="http://schemas.microsoft.com/sharepoint/v3/contenttype/forms">
-  <Display>DocumentLibraryForm</Display>
-  <Edit>DocumentLibraryForm</Edit>
-  <New>DocumentLibraryForm</New>
-</FormTemplates>
-</file>
-
-<file path=customXml/item2.xml><?xml version="1.0" encoding="utf-8"?>
 <p:properties xmlns:p="http://schemas.microsoft.com/office/2006/metadata/properties" xmlns:xsi="http://www.w3.org/2001/XMLSchema-instance" xmlns:pc="http://schemas.microsoft.com/office/infopath/2007/PartnerControls">
   <documentManagement>
     <SharedWithUsers xmlns="d6656b4d-3fa0-4709-acfb-d5e813445d1e">
@@ -14776,6 +15820,15 @@
     <TaxCatchAll xmlns="d6656b4d-3fa0-4709-acfb-d5e813445d1e" xsi:nil="true"/>
   </documentManagement>
 </p:properties>
+</file>
+
+<file path=customXml/item2.xml><?xml version="1.0" encoding="utf-8"?>
+<?mso-contentType ?>
+<FormTemplates xmlns="http://schemas.microsoft.com/sharepoint/v3/contenttype/forms">
+  <Display>DocumentLibraryForm</Display>
+  <Edit>DocumentLibraryForm</Edit>
+  <New>DocumentLibraryForm</New>
+</FormTemplates>
 </file>
 
 <file path=customXml/item3.xml><?xml version="1.0" encoding="utf-8"?>
@@ -15002,14 +16055,6 @@
 </file>
 
 <file path=customXml/itemProps1.xml><?xml version="1.0" encoding="utf-8"?>
-<ds:datastoreItem xmlns:ds="http://schemas.openxmlformats.org/officeDocument/2006/customXml" ds:itemID="{F5B64EEB-1B4A-4920-AA44-E234D7D487D1}">
-  <ds:schemaRefs>
-    <ds:schemaRef ds:uri="http://schemas.microsoft.com/sharepoint/v3/contenttype/forms"/>
-  </ds:schemaRefs>
-</ds:datastoreItem>
-</file>
-
-<file path=customXml/itemProps2.xml><?xml version="1.0" encoding="utf-8"?>
 <ds:datastoreItem xmlns:ds="http://schemas.openxmlformats.org/officeDocument/2006/customXml" ds:itemID="{21DE0D6C-581B-4814-98E7-EF172D5D46A1}">
   <ds:schemaRefs>
     <ds:schemaRef ds:uri="http://purl.org/dc/elements/1.1/"/>
@@ -15022,6 +16067,14 @@
     <ds:schemaRef ds:uri="http://schemas.microsoft.com/office/2006/metadata/properties"/>
     <ds:schemaRef ds:uri="http://www.w3.org/XML/1998/namespace"/>
     <ds:schemaRef ds:uri="http://purl.org/dc/dcmitype/"/>
+  </ds:schemaRefs>
+</ds:datastoreItem>
+</file>
+
+<file path=customXml/itemProps2.xml><?xml version="1.0" encoding="utf-8"?>
+<ds:datastoreItem xmlns:ds="http://schemas.openxmlformats.org/officeDocument/2006/customXml" ds:itemID="{F5B64EEB-1B4A-4920-AA44-E234D7D487D1}">
+  <ds:schemaRefs>
+    <ds:schemaRef ds:uri="http://schemas.microsoft.com/sharepoint/v3/contenttype/forms"/>
   </ds:schemaRefs>
 </ds:datastoreItem>
 </file>

--- a/Documentation/Slides/Week_31.pptx
+++ b/Documentation/Slides/Week_31.pptx
@@ -11,10 +11,10 @@
     <p:sldId id="267" r:id="rId5"/>
     <p:sldId id="279" r:id="rId6"/>
     <p:sldId id="287" r:id="rId7"/>
-    <p:sldId id="288" r:id="rId8"/>
-    <p:sldId id="289" r:id="rId9"/>
-    <p:sldId id="290" r:id="rId10"/>
-    <p:sldId id="291" r:id="rId11"/>
+    <p:sldId id="289" r:id="rId8"/>
+    <p:sldId id="290" r:id="rId9"/>
+    <p:sldId id="291" r:id="rId10"/>
+    <p:sldId id="288" r:id="rId11"/>
     <p:sldId id="286" r:id="rId12"/>
     <p:sldId id="277" r:id="rId13"/>
   </p:sldIdLst>
@@ -250,7 +250,7 @@
           <a:p>
             <a:fld id="{01926CF7-48D8-2F46-AFC8-8A5D2298DFDD}" type="datetimeFigureOut">
               <a:rPr lang="en-US" smtClean="0"/>
-              <a:t>5/11/26</a:t>
+              <a:t>5/18/26</a:t>
             </a:fld>
             <a:endParaRPr lang="en-US"/>
           </a:p>
@@ -13608,7 +13608,7 @@
               <a:rPr lang="en-US" b="1" dirty="0">
                 <a:latin typeface="Acumin Pro Condensed Semibold" panose="020B0506020202020204" pitchFamily="34" charset="77"/>
               </a:rPr>
-              <a:t>Week 14</a:t>
+              <a:t>Week 1</a:t>
             </a:r>
           </a:p>
         </p:txBody>
@@ -13668,7 +13668,7 @@
           <a:p>
             <a:r>
               <a:rPr lang="en-US" dirty="0"/>
-              <a:t>04/17/26</a:t>
+              <a:t>05/18/26</a:t>
             </a:r>
           </a:p>
         </p:txBody>
@@ -13726,7 +13726,7 @@
           <a:p>
             <a:r>
               <a:rPr lang="en-US" dirty="0"/>
-              <a:t>Weekly Progress!</a:t>
+              <a:t>Weekly Progress</a:t>
             </a:r>
           </a:p>
         </p:txBody>
@@ -13758,7 +13758,47 @@
             </a:pPr>
             <a:r>
               <a:rPr lang="en-US" dirty="0"/>
-              <a:t>Paper Updates</a:t>
+              <a:t>PCB Updates</a:t>
+            </a:r>
+          </a:p>
+          <a:p>
+            <a:pPr marL="685800" lvl="1" indent="-342900">
+              <a:buFont typeface="Arial" panose="020B0604020202020204" pitchFamily="34" charset="0"/>
+              <a:buChar char="•"/>
+            </a:pPr>
+            <a:r>
+              <a:rPr lang="en-US" dirty="0"/>
+              <a:t>New symbol designed</a:t>
+            </a:r>
+          </a:p>
+          <a:p>
+            <a:pPr marL="685800" lvl="1" indent="-342900">
+              <a:buFont typeface="Arial" panose="020B0604020202020204" pitchFamily="34" charset="0"/>
+              <a:buChar char="•"/>
+            </a:pPr>
+            <a:r>
+              <a:rPr lang="en-US" dirty="0"/>
+              <a:t>New footprint designed</a:t>
+            </a:r>
+          </a:p>
+          <a:p>
+            <a:pPr marL="685800" lvl="1" indent="-342900">
+              <a:buFont typeface="Arial" panose="020B0604020202020204" pitchFamily="34" charset="0"/>
+              <a:buChar char="•"/>
+            </a:pPr>
+            <a:r>
+              <a:rPr lang="en-US" dirty="0"/>
+              <a:t>Power analysis done on P1110b</a:t>
+            </a:r>
+          </a:p>
+          <a:p>
+            <a:pPr marL="285750" indent="-285750">
+              <a:buFont typeface="Arial" panose="020B0604020202020204" pitchFamily="34" charset="0"/>
+              <a:buChar char="•"/>
+            </a:pPr>
+            <a:r>
+              <a:rPr lang="en-US" dirty="0"/>
+              <a:t>Summer Updates</a:t>
             </a:r>
           </a:p>
           <a:p>
@@ -13768,7 +13808,17 @@
             </a:pPr>
             <a:r>
               <a:rPr lang="en-US" dirty="0"/>
-              <a:t>Paper Submitted</a:t>
+              <a:t>Summer Calendar submitted and signed</a:t>
+            </a:r>
+          </a:p>
+          <a:p>
+            <a:pPr marL="285750" indent="-285750">
+              <a:buFont typeface="Arial" panose="020B0604020202020204" pitchFamily="34" charset="0"/>
+              <a:buChar char="•"/>
+            </a:pPr>
+            <a:r>
+              <a:rPr lang="en-US" dirty="0"/>
+              <a:t>Training Updates</a:t>
             </a:r>
           </a:p>
           <a:p>
@@ -13778,57 +13828,7 @@
             </a:pPr>
             <a:r>
               <a:rPr lang="en-US" dirty="0"/>
-              <a:t>Paper Revisions (If necessary) Version 1</a:t>
-            </a:r>
-          </a:p>
-          <a:p>
-            <a:pPr marL="285750" indent="-285750">
-              <a:buFont typeface="Arial" panose="020B0604020202020204" pitchFamily="34" charset="0"/>
-              <a:buChar char="•"/>
-            </a:pPr>
-            <a:r>
-              <a:rPr lang="en-US" dirty="0"/>
-              <a:t>PCB Updates</a:t>
-            </a:r>
-          </a:p>
-          <a:p>
-            <a:pPr marL="685800" lvl="1" indent="-342900">
-              <a:buFont typeface="Arial" panose="020B0604020202020204" pitchFamily="34" charset="0"/>
-              <a:buChar char="•"/>
-            </a:pPr>
-            <a:r>
-              <a:rPr lang="en-US" dirty="0"/>
-              <a:t>Switch over to P1110B with NDA Issues</a:t>
-            </a:r>
-          </a:p>
-          <a:p>
-            <a:pPr marL="285750" indent="-285750">
-              <a:buFont typeface="Arial" panose="020B0604020202020204" pitchFamily="34" charset="0"/>
-              <a:buChar char="•"/>
-            </a:pPr>
-            <a:r>
-              <a:rPr lang="en-US" dirty="0"/>
-              <a:t>Summer Updates</a:t>
-            </a:r>
-          </a:p>
-          <a:p>
-            <a:pPr marL="628650" lvl="1" indent="-285750">
-              <a:buFont typeface="Arial" panose="020B0604020202020204" pitchFamily="34" charset="0"/>
-              <a:buChar char="•"/>
-            </a:pPr>
-            <a:r>
-              <a:rPr lang="en-US" dirty="0"/>
-              <a:t>Summer Calendar created</a:t>
-            </a:r>
-          </a:p>
-          <a:p>
-            <a:pPr marL="628650" lvl="1" indent="-285750">
-              <a:buFont typeface="Arial" panose="020B0604020202020204" pitchFamily="34" charset="0"/>
-              <a:buChar char="•"/>
-            </a:pPr>
-            <a:r>
-              <a:rPr lang="en-US" dirty="0"/>
-              <a:t>Work for summer outlined</a:t>
+              <a:t>Required Trainings Completed</a:t>
             </a:r>
           </a:p>
           <a:p>
@@ -13970,7 +13970,7 @@
           <p:cNvPr id="2" name="Text Placeholder 1">
             <a:extLst>
               <a:ext uri="{FF2B5EF4-FFF2-40B4-BE49-F238E27FC236}">
-                <a16:creationId xmlns:a16="http://schemas.microsoft.com/office/drawing/2014/main" id="{0B55F92D-8E22-6CA2-89ED-C7F7DD5CF810}"/>
+                <a16:creationId xmlns:a16="http://schemas.microsoft.com/office/drawing/2014/main" id="{51525BEF-8705-5EAE-832F-529E916BD3C4}"/>
               </a:ext>
             </a:extLst>
           </p:cNvPr>
@@ -13988,7 +13988,7 @@
           <a:p>
             <a:r>
               <a:rPr lang="en-US" dirty="0"/>
-              <a:t>Paper Submitted!</a:t>
+              <a:t>New symbol designed</a:t>
             </a:r>
           </a:p>
         </p:txBody>
@@ -13998,7 +13998,7 @@
           <p:cNvPr id="3" name="Text Placeholder 2">
             <a:extLst>
               <a:ext uri="{FF2B5EF4-FFF2-40B4-BE49-F238E27FC236}">
-                <a16:creationId xmlns:a16="http://schemas.microsoft.com/office/drawing/2014/main" id="{D8B3A95D-39C4-0805-F345-ECE7A3650B35}"/>
+                <a16:creationId xmlns:a16="http://schemas.microsoft.com/office/drawing/2014/main" id="{CB67C5AD-CDCA-95FD-AF39-E126D3CAC0E8}"/>
               </a:ext>
             </a:extLst>
           </p:cNvPr>
@@ -14020,11 +14020,7 @@
             </a:pPr>
             <a:r>
               <a:rPr lang="en-US" dirty="0"/>
-              <a:t>Submission went through for IEEE Sensors on May 4</a:t>
-            </a:r>
-            <a:r>
-              <a:rPr lang="en-US" baseline="30000" dirty="0"/>
-              <a:t>th</a:t>
+              <a:t>Designed to match P1110B</a:t>
             </a:r>
           </a:p>
           <a:p>
@@ -14034,7 +14030,7 @@
             </a:pPr>
             <a:r>
               <a:rPr lang="en-US" dirty="0"/>
-              <a:t>Notification of Paper Acceptance: August 9th</a:t>
+              <a:t>Grounds need to be separate</a:t>
             </a:r>
           </a:p>
           <a:p>
@@ -14042,7 +14038,16 @@
               <a:buFont typeface="Arial" panose="020B0604020202020204" pitchFamily="34" charset="0"/>
               <a:buChar char="•"/>
             </a:pPr>
-            <a:endParaRPr lang="en-US" dirty="0"/>
+            <a:r>
+              <a:rPr lang="en-US" dirty="0"/>
+              <a:t>Might cause interference</a:t>
+            </a:r>
+          </a:p>
+          <a:p>
+            <a:r>
+              <a:rPr lang="en-US" dirty="0"/>
+              <a:t> </a:t>
+            </a:r>
           </a:p>
         </p:txBody>
       </p:sp>
@@ -14051,7 +14056,7 @@
           <p:cNvPr id="4" name="Title 3">
             <a:extLst>
               <a:ext uri="{FF2B5EF4-FFF2-40B4-BE49-F238E27FC236}">
-                <a16:creationId xmlns:a16="http://schemas.microsoft.com/office/drawing/2014/main" id="{257D4FA0-845F-9861-4A86-7C8FFCFC8416}"/>
+                <a16:creationId xmlns:a16="http://schemas.microsoft.com/office/drawing/2014/main" id="{554E8E70-B190-3C76-2A2E-3EA3B87CAC8F}"/>
               </a:ext>
             </a:extLst>
           </p:cNvPr>
@@ -14069,7 +14074,7 @@
           <a:p>
             <a:r>
               <a:rPr lang="en-US" dirty="0"/>
-              <a:t>Paper Updates</a:t>
+              <a:t>PCB Updates</a:t>
             </a:r>
           </a:p>
         </p:txBody>
@@ -14079,7 +14084,7 @@
           <p:cNvPr id="5" name="Footer Placeholder 4">
             <a:extLst>
               <a:ext uri="{FF2B5EF4-FFF2-40B4-BE49-F238E27FC236}">
-                <a16:creationId xmlns:a16="http://schemas.microsoft.com/office/drawing/2014/main" id="{1205AE02-26A9-FFFF-498A-CAEA3D5BEABF}"/>
+                <a16:creationId xmlns:a16="http://schemas.microsoft.com/office/drawing/2014/main" id="{E6FF2D39-572E-6541-A578-F9DC1914740D}"/>
               </a:ext>
             </a:extLst>
           </p:cNvPr>
@@ -14106,10 +14111,10 @@
       </p:sp>
       <p:pic>
         <p:nvPicPr>
-          <p:cNvPr id="9" name="Picture 8">
-            <a:extLst>
-              <a:ext uri="{FF2B5EF4-FFF2-40B4-BE49-F238E27FC236}">
-                <a16:creationId xmlns:a16="http://schemas.microsoft.com/office/drawing/2014/main" id="{BE5E6123-3717-9E35-C6C3-3EF97A090B25}"/>
+          <p:cNvPr id="8" name="Picture 7">
+            <a:extLst>
+              <a:ext uri="{FF2B5EF4-FFF2-40B4-BE49-F238E27FC236}">
+                <a16:creationId xmlns:a16="http://schemas.microsoft.com/office/drawing/2014/main" id="{C522A4A5-5F47-AEB7-1F80-C63AE43556F2}"/>
               </a:ext>
             </a:extLst>
           </p:cNvPr>
@@ -14126,8 +14131,8 @@
         </p:blipFill>
         <p:spPr>
           <a:xfrm>
-            <a:off x="554636" y="2906767"/>
-            <a:ext cx="7772400" cy="2748075"/>
+            <a:off x="3268998" y="2623280"/>
+            <a:ext cx="5132051" cy="3173442"/>
           </a:xfrm>
           <a:prstGeom prst="rect">
             <a:avLst/>
@@ -14137,7 +14142,7 @@
     </p:spTree>
     <p:extLst>
       <p:ext uri="{BB962C8B-B14F-4D97-AF65-F5344CB8AC3E}">
-        <p14:creationId xmlns:p14="http://schemas.microsoft.com/office/powerpoint/2010/main" val="2964078218"/>
+        <p14:creationId xmlns:p14="http://schemas.microsoft.com/office/powerpoint/2010/main" val="801393480"/>
       </p:ext>
     </p:extLst>
   </p:cSld>
@@ -14155,7 +14160,7 @@
         <p:cNvPr id="1" name="">
           <a:extLst>
             <a:ext uri="{FF2B5EF4-FFF2-40B4-BE49-F238E27FC236}">
-              <a16:creationId xmlns:a16="http://schemas.microsoft.com/office/drawing/2014/main" id="{36BEFC58-6E3D-9657-0C2C-F89588D19B21}"/>
+              <a16:creationId xmlns:a16="http://schemas.microsoft.com/office/drawing/2014/main" id="{1A3FF5E6-12DA-2B2B-A71F-4C6E1DBABF43}"/>
             </a:ext>
           </a:extLst>
         </p:cNvPr>
@@ -14175,7 +14180,7 @@
           <p:cNvPr id="2" name="Text Placeholder 1">
             <a:extLst>
               <a:ext uri="{FF2B5EF4-FFF2-40B4-BE49-F238E27FC236}">
-                <a16:creationId xmlns:a16="http://schemas.microsoft.com/office/drawing/2014/main" id="{04B41760-6972-BEF4-EFC0-74797874A745}"/>
+                <a16:creationId xmlns:a16="http://schemas.microsoft.com/office/drawing/2014/main" id="{9EC89B8B-9C0D-6D55-E74D-251C82755BE2}"/>
               </a:ext>
             </a:extLst>
           </p:cNvPr>
@@ -14193,7 +14198,7 @@
           <a:p>
             <a:r>
               <a:rPr lang="en-US" dirty="0"/>
-              <a:t>Paper Revisions (if necessary) Version 1</a:t>
+              <a:t>New footprint designed</a:t>
             </a:r>
           </a:p>
         </p:txBody>
@@ -14203,7 +14208,7 @@
           <p:cNvPr id="3" name="Text Placeholder 2">
             <a:extLst>
               <a:ext uri="{FF2B5EF4-FFF2-40B4-BE49-F238E27FC236}">
-                <a16:creationId xmlns:a16="http://schemas.microsoft.com/office/drawing/2014/main" id="{695F57F2-0C4B-9BC9-25D6-CCE91A8D93DD}"/>
+                <a16:creationId xmlns:a16="http://schemas.microsoft.com/office/drawing/2014/main" id="{E3405D0A-E861-A612-6E75-9384326D145E}"/>
               </a:ext>
             </a:extLst>
           </p:cNvPr>
@@ -14225,7 +14230,7 @@
             </a:pPr>
             <a:r>
               <a:rPr lang="en-US" dirty="0"/>
-              <a:t>Paper edits cannot be made currently</a:t>
+              <a:t>Designed to match P1110B</a:t>
             </a:r>
           </a:p>
           <a:p>
@@ -14235,46 +14240,7 @@
             </a:pPr>
             <a:r>
               <a:rPr lang="en-US" dirty="0"/>
-              <a:t>Still have revisions I would like to make</a:t>
-            </a:r>
-          </a:p>
-          <a:p>
-            <a:pPr marL="628650" lvl="1" indent="-285750">
-              <a:buFont typeface="Arial" panose="020B0604020202020204" pitchFamily="34" charset="0"/>
-              <a:buChar char="•"/>
-            </a:pPr>
-            <a:r>
-              <a:rPr lang="en-US" dirty="0" err="1"/>
-              <a:t>Draw.io</a:t>
-            </a:r>
-            <a:r>
-              <a:rPr lang="en-US" dirty="0"/>
-              <a:t> diagrams for circuits to emphasize clarity</a:t>
-            </a:r>
-          </a:p>
-          <a:p>
-            <a:pPr marL="628650" lvl="1" indent="-285750">
-              <a:buFont typeface="Arial" panose="020B0604020202020204" pitchFamily="34" charset="0"/>
-              <a:buChar char="•"/>
-            </a:pPr>
-            <a:r>
-              <a:rPr lang="en-US" dirty="0"/>
-              <a:t>Adding </a:t>
-            </a:r>
-            <a:r>
-              <a:rPr lang="en-US" dirty="0" err="1"/>
-              <a:t>OrCID</a:t>
-            </a:r>
-            <a:endParaRPr lang="en-US" dirty="0"/>
-          </a:p>
-          <a:p>
-            <a:pPr marL="628650" lvl="1" indent="-285750">
-              <a:buFont typeface="Arial" panose="020B0604020202020204" pitchFamily="34" charset="0"/>
-              <a:buChar char="•"/>
-            </a:pPr>
-            <a:r>
-              <a:rPr lang="en-US" dirty="0"/>
-              <a:t>More detail on results</a:t>
+              <a:t>Powercast device will need to be elevated on board because it is an external product </a:t>
             </a:r>
           </a:p>
         </p:txBody>
@@ -14284,7 +14250,7 @@
           <p:cNvPr id="4" name="Title 3">
             <a:extLst>
               <a:ext uri="{FF2B5EF4-FFF2-40B4-BE49-F238E27FC236}">
-                <a16:creationId xmlns:a16="http://schemas.microsoft.com/office/drawing/2014/main" id="{8BCEE9AE-86F7-C315-FF71-5687B255CBED}"/>
+                <a16:creationId xmlns:a16="http://schemas.microsoft.com/office/drawing/2014/main" id="{92106257-2C01-21D7-141E-589A821CA3BF}"/>
               </a:ext>
             </a:extLst>
           </p:cNvPr>
@@ -14302,7 +14268,7 @@
           <a:p>
             <a:r>
               <a:rPr lang="en-US" dirty="0"/>
-              <a:t>Paper Updates</a:t>
+              <a:t>PCB Updates</a:t>
             </a:r>
           </a:p>
         </p:txBody>
@@ -14312,7 +14278,7 @@
           <p:cNvPr id="5" name="Footer Placeholder 4">
             <a:extLst>
               <a:ext uri="{FF2B5EF4-FFF2-40B4-BE49-F238E27FC236}">
-                <a16:creationId xmlns:a16="http://schemas.microsoft.com/office/drawing/2014/main" id="{FF7C90DD-F8E1-A2AA-55E0-898C0C471D7B}"/>
+                <a16:creationId xmlns:a16="http://schemas.microsoft.com/office/drawing/2014/main" id="{B0B94203-7021-CD8B-F41A-28BFC0285B96}"/>
               </a:ext>
             </a:extLst>
           </p:cNvPr>
@@ -14337,10 +14303,40 @@
           </a:p>
         </p:txBody>
       </p:sp>
+      <p:pic>
+        <p:nvPicPr>
+          <p:cNvPr id="7" name="Picture 6">
+            <a:extLst>
+              <a:ext uri="{FF2B5EF4-FFF2-40B4-BE49-F238E27FC236}">
+                <a16:creationId xmlns:a16="http://schemas.microsoft.com/office/drawing/2014/main" id="{2FB05CBF-2636-F231-EF8C-6B0C06315BB6}"/>
+              </a:ext>
+            </a:extLst>
+          </p:cNvPr>
+          <p:cNvPicPr>
+            <a:picLocks noChangeAspect="1"/>
+          </p:cNvPicPr>
+          <p:nvPr/>
+        </p:nvPicPr>
+        <p:blipFill>
+          <a:blip r:embed="rId2"/>
+          <a:stretch>
+            <a:fillRect/>
+          </a:stretch>
+        </p:blipFill>
+        <p:spPr>
+          <a:xfrm>
+            <a:off x="3957402" y="2939404"/>
+            <a:ext cx="4265847" cy="3398217"/>
+          </a:xfrm>
+          <a:prstGeom prst="rect">
+            <a:avLst/>
+          </a:prstGeom>
+        </p:spPr>
+      </p:pic>
     </p:spTree>
     <p:extLst>
       <p:ext uri="{BB962C8B-B14F-4D97-AF65-F5344CB8AC3E}">
-        <p14:creationId xmlns:p14="http://schemas.microsoft.com/office/powerpoint/2010/main" val="2686482182"/>
+        <p14:creationId xmlns:p14="http://schemas.microsoft.com/office/powerpoint/2010/main" val="2897858643"/>
       </p:ext>
     </p:extLst>
   </p:cSld>
@@ -14355,7 +14351,13 @@
   <p:cSld>
     <p:spTree>
       <p:nvGrpSpPr>
-        <p:cNvPr id="1" name=""/>
+        <p:cNvPr id="1" name="">
+          <a:extLst>
+            <a:ext uri="{FF2B5EF4-FFF2-40B4-BE49-F238E27FC236}">
+              <a16:creationId xmlns:a16="http://schemas.microsoft.com/office/drawing/2014/main" id="{04284FE0-B695-4D26-8A20-A1D89E093383}"/>
+            </a:ext>
+          </a:extLst>
+        </p:cNvPr>
         <p:cNvGrpSpPr/>
         <p:nvPr/>
       </p:nvGrpSpPr>
@@ -14372,7 +14374,7 @@
           <p:cNvPr id="2" name="Text Placeholder 1">
             <a:extLst>
               <a:ext uri="{FF2B5EF4-FFF2-40B4-BE49-F238E27FC236}">
-                <a16:creationId xmlns:a16="http://schemas.microsoft.com/office/drawing/2014/main" id="{B29C9EC2-B9B1-F5AA-C73B-0329D506F329}"/>
+                <a16:creationId xmlns:a16="http://schemas.microsoft.com/office/drawing/2014/main" id="{A67BCF0B-03DF-7AFC-CB8A-BB630443C865}"/>
               </a:ext>
             </a:extLst>
           </p:cNvPr>
@@ -14390,7 +14392,7 @@
           <a:p>
             <a:r>
               <a:rPr lang="en-US" dirty="0"/>
-              <a:t>Switch over to P1110B with NDA Issues</a:t>
+              <a:t>Power analysis</a:t>
             </a:r>
           </a:p>
         </p:txBody>
@@ -14400,7 +14402,7 @@
           <p:cNvPr id="3" name="Text Placeholder 2">
             <a:extLst>
               <a:ext uri="{FF2B5EF4-FFF2-40B4-BE49-F238E27FC236}">
-                <a16:creationId xmlns:a16="http://schemas.microsoft.com/office/drawing/2014/main" id="{86FD3585-3B95-520C-827F-69FEA064EACF}"/>
+                <a16:creationId xmlns:a16="http://schemas.microsoft.com/office/drawing/2014/main" id="{F693CCFC-072F-D579-D82A-F2BE806734FB}"/>
               </a:ext>
             </a:extLst>
           </p:cNvPr>
@@ -14411,39 +14413,153 @@
             <p:ph type="body" sz="quarter" idx="10"/>
           </p:nvPr>
         </p:nvSpPr>
-        <p:spPr/>
+        <p:spPr>
+          <a:xfrm>
+            <a:off x="184731" y="1494337"/>
+            <a:ext cx="8450035" cy="4454706"/>
+          </a:xfrm>
+        </p:spPr>
         <p:txBody>
           <a:bodyPr/>
           <a:lstStyle/>
+          <a:p>
+            <a:pPr marL="285750" lvl="0" indent="-285750" defTabSz="914400" eaLnBrk="0" fontAlgn="base" hangingPunct="0">
+              <a:lnSpc>
+                <a:spcPct val="100000"/>
+              </a:lnSpc>
+              <a:spcBef>
+                <a:spcPct val="0"/>
+              </a:spcBef>
+              <a:spcAft>
+                <a:spcPct val="0"/>
+              </a:spcAft>
+              <a:buFont typeface="Arial" panose="020B0604020202020204" pitchFamily="34" charset="0"/>
+              <a:buChar char="•"/>
+            </a:pPr>
+            <a:r>
+              <a:rPr lang="en-US" altLang="en-US" dirty="0">
+                <a:solidFill>
+                  <a:srgbClr val="000000"/>
+                </a:solidFill>
+                <a:latin typeface="Arial" panose="020B0604020202020204" pitchFamily="34" charset="0"/>
+              </a:rPr>
+              <a:t>Peak Output Power: 210 </a:t>
+            </a:r>
+            <a:r>
+              <a:rPr lang="en-US" altLang="en-US" dirty="0" err="1">
+                <a:solidFill>
+                  <a:srgbClr val="000000"/>
+                </a:solidFill>
+                <a:latin typeface="Arial" panose="020B0604020202020204" pitchFamily="34" charset="0"/>
+              </a:rPr>
+              <a:t>mW</a:t>
+            </a:r>
+            <a:r>
+              <a:rPr lang="en-US" altLang="en-US" dirty="0">
+                <a:solidFill>
+                  <a:srgbClr val="000000"/>
+                </a:solidFill>
+                <a:latin typeface="Arial" panose="020B0604020202020204" pitchFamily="34" charset="0"/>
+              </a:rPr>
+              <a:t> (0.21 Watts) at maximum RF input.</a:t>
+            </a:r>
+          </a:p>
+          <a:p>
+            <a:pPr marL="285750" lvl="0" indent="-285750" defTabSz="914400" eaLnBrk="0" fontAlgn="base" hangingPunct="0">
+              <a:lnSpc>
+                <a:spcPct val="100000"/>
+              </a:lnSpc>
+              <a:spcBef>
+                <a:spcPct val="0"/>
+              </a:spcBef>
+              <a:spcAft>
+                <a:spcPct val="0"/>
+              </a:spcAft>
+              <a:buFont typeface="Arial" panose="020B0604020202020204" pitchFamily="34" charset="0"/>
+              <a:buChar char="•"/>
+            </a:pPr>
+            <a:r>
+              <a:rPr lang="en-US" altLang="en-US" dirty="0">
+                <a:solidFill>
+                  <a:srgbClr val="000000"/>
+                </a:solidFill>
+                <a:latin typeface="Arial" panose="020B0604020202020204" pitchFamily="34" charset="0"/>
+              </a:rPr>
+              <a:t>Maximum Output Current: 100 mA.</a:t>
+            </a:r>
+          </a:p>
+          <a:p>
+            <a:pPr marL="285750" lvl="0" indent="-285750" defTabSz="914400" eaLnBrk="0" fontAlgn="base" hangingPunct="0">
+              <a:lnSpc>
+                <a:spcPct val="100000"/>
+              </a:lnSpc>
+              <a:spcBef>
+                <a:spcPct val="0"/>
+              </a:spcBef>
+              <a:spcAft>
+                <a:spcPct val="0"/>
+              </a:spcAft>
+              <a:buFont typeface="Arial" panose="020B0604020202020204" pitchFamily="34" charset="0"/>
+              <a:buChar char="•"/>
+            </a:pPr>
+            <a:r>
+              <a:rPr lang="en-US" altLang="en-US" dirty="0">
+                <a:solidFill>
+                  <a:srgbClr val="000000"/>
+                </a:solidFill>
+                <a:latin typeface="Arial" panose="020B0604020202020204" pitchFamily="34" charset="0"/>
+              </a:rPr>
+              <a:t>Configurable Output Voltage: Up to 4.2V for Lithium-Ion or 3.3V for Alkaline.</a:t>
+            </a:r>
+          </a:p>
+          <a:p>
+            <a:pPr marL="285750" lvl="0" indent="-285750" defTabSz="914400" eaLnBrk="0" fontAlgn="base" hangingPunct="0">
+              <a:lnSpc>
+                <a:spcPct val="100000"/>
+              </a:lnSpc>
+              <a:spcBef>
+                <a:spcPct val="0"/>
+              </a:spcBef>
+              <a:spcAft>
+                <a:spcPct val="0"/>
+              </a:spcAft>
+              <a:buFont typeface="Arial" panose="020B0604020202020204" pitchFamily="34" charset="0"/>
+              <a:buChar char="•"/>
+            </a:pPr>
+            <a:r>
+              <a:rPr lang="en-US" altLang="en-US" dirty="0">
+                <a:solidFill>
+                  <a:srgbClr val="000000"/>
+                </a:solidFill>
+                <a:latin typeface="Arial" panose="020B0604020202020204" pitchFamily="34" charset="0"/>
+              </a:rPr>
+              <a:t>Conversion Efficiency: Exceeds </a:t>
+            </a:r>
+            <a:r>
+              <a:rPr lang="en-US" altLang="en-US" b="1" dirty="0">
+                <a:solidFill>
+                  <a:srgbClr val="000000"/>
+                </a:solidFill>
+                <a:latin typeface="Arial" panose="020B0604020202020204" pitchFamily="34" charset="0"/>
+              </a:rPr>
+              <a:t>70%</a:t>
+            </a:r>
+            <a:r>
+              <a:rPr lang="en-US" altLang="en-US" dirty="0">
+                <a:solidFill>
+                  <a:srgbClr val="000000"/>
+                </a:solidFill>
+                <a:latin typeface="Arial" panose="020B0604020202020204" pitchFamily="34" charset="0"/>
+              </a:rPr>
+              <a:t> efficiency when converting RF energy to DC power.</a:t>
+            </a:r>
+          </a:p>
           <a:p>
             <a:pPr marL="285750" indent="-285750">
               <a:buFont typeface="Arial" panose="020B0604020202020204" pitchFamily="34" charset="0"/>
               <a:buChar char="•"/>
             </a:pPr>
-            <a:r>
-              <a:rPr lang="en-US" dirty="0"/>
-              <a:t>NDA never returned or signed from Legal department</a:t>
-            </a:r>
-          </a:p>
-          <a:p>
-            <a:pPr marL="285750" indent="-285750">
-              <a:buFont typeface="Arial" panose="020B0604020202020204" pitchFamily="34" charset="0"/>
-              <a:buChar char="•"/>
-            </a:pPr>
-            <a:r>
-              <a:rPr lang="en-US" dirty="0"/>
-              <a:t>Switch to P1110B (No NDA required)</a:t>
-            </a:r>
-          </a:p>
-          <a:p>
-            <a:pPr marL="285750" indent="-285750">
-              <a:buFont typeface="Arial" panose="020B0604020202020204" pitchFamily="34" charset="0"/>
-              <a:buChar char="•"/>
-            </a:pPr>
-            <a:r>
-              <a:rPr lang="en-US" dirty="0"/>
-              <a:t>Much more reliable device in the end</a:t>
-            </a:r>
+            <a:endParaRPr lang="en-US" dirty="0"/>
           </a:p>
         </p:txBody>
       </p:sp>
@@ -14452,7 +14568,7 @@
           <p:cNvPr id="4" name="Title 3">
             <a:extLst>
               <a:ext uri="{FF2B5EF4-FFF2-40B4-BE49-F238E27FC236}">
-                <a16:creationId xmlns:a16="http://schemas.microsoft.com/office/drawing/2014/main" id="{521F8A32-1A54-8282-0017-DD24427F76DE}"/>
+                <a16:creationId xmlns:a16="http://schemas.microsoft.com/office/drawing/2014/main" id="{C44A8C05-A32A-4D3D-5945-A8A955FC5BF6}"/>
               </a:ext>
             </a:extLst>
           </p:cNvPr>
@@ -14480,7 +14596,7 @@
           <p:cNvPr id="5" name="Footer Placeholder 4">
             <a:extLst>
               <a:ext uri="{FF2B5EF4-FFF2-40B4-BE49-F238E27FC236}">
-                <a16:creationId xmlns:a16="http://schemas.microsoft.com/office/drawing/2014/main" id="{889FB49F-24B3-78C7-0793-249E715B704C}"/>
+                <a16:creationId xmlns:a16="http://schemas.microsoft.com/office/drawing/2014/main" id="{3C4EE2F1-48E6-5FAE-F1C6-EEE3CD7B912D}"/>
               </a:ext>
             </a:extLst>
           </p:cNvPr>
@@ -14505,40 +14621,10 @@
           </a:p>
         </p:txBody>
       </p:sp>
-      <p:pic>
-        <p:nvPicPr>
-          <p:cNvPr id="6" name="Picture 5">
-            <a:extLst>
-              <a:ext uri="{FF2B5EF4-FFF2-40B4-BE49-F238E27FC236}">
-                <a16:creationId xmlns:a16="http://schemas.microsoft.com/office/drawing/2014/main" id="{7D4CE899-C16F-18A4-D8B4-38C1F0BB3207}"/>
-              </a:ext>
-            </a:extLst>
-          </p:cNvPr>
-          <p:cNvPicPr>
-            <a:picLocks noChangeAspect="1"/>
-          </p:cNvPicPr>
-          <p:nvPr/>
-        </p:nvPicPr>
-        <p:blipFill>
-          <a:blip r:embed="rId2"/>
-          <a:stretch>
-            <a:fillRect/>
-          </a:stretch>
-        </p:blipFill>
-        <p:spPr>
-          <a:xfrm>
-            <a:off x="4313879" y="2496386"/>
-            <a:ext cx="3817257" cy="3028113"/>
-          </a:xfrm>
-          <a:prstGeom prst="rect">
-            <a:avLst/>
-          </a:prstGeom>
-        </p:spPr>
-      </p:pic>
     </p:spTree>
     <p:extLst>
       <p:ext uri="{BB962C8B-B14F-4D97-AF65-F5344CB8AC3E}">
-        <p14:creationId xmlns:p14="http://schemas.microsoft.com/office/powerpoint/2010/main" val="3437462689"/>
+        <p14:creationId xmlns:p14="http://schemas.microsoft.com/office/powerpoint/2010/main" val="1570870436"/>
       </p:ext>
     </p:extLst>
   </p:cSld>
@@ -14565,161 +14651,12 @@
           <a:chExt cx="0" cy="0"/>
         </a:xfrm>
       </p:grpSpPr>
-      <p:sp>
-        <p:nvSpPr>
-          <p:cNvPr id="2" name="Text Placeholder 1">
-            <a:extLst>
-              <a:ext uri="{FF2B5EF4-FFF2-40B4-BE49-F238E27FC236}">
-                <a16:creationId xmlns:a16="http://schemas.microsoft.com/office/drawing/2014/main" id="{6AC04910-8F9F-97E3-4EBF-6C4813123975}"/>
-              </a:ext>
-            </a:extLst>
-          </p:cNvPr>
-          <p:cNvSpPr>
-            <a:spLocks noGrp="1"/>
-          </p:cNvSpPr>
-          <p:nvPr>
-            <p:ph type="body" sz="quarter" idx="11"/>
-          </p:nvPr>
-        </p:nvSpPr>
-        <p:spPr/>
-        <p:txBody>
-          <a:bodyPr/>
-          <a:lstStyle/>
-          <a:p>
-            <a:r>
-              <a:rPr lang="en-US" dirty="0"/>
-              <a:t>Summer Calendar created</a:t>
-            </a:r>
-          </a:p>
-          <a:p>
-            <a:endParaRPr lang="en-US" dirty="0"/>
-          </a:p>
-        </p:txBody>
-      </p:sp>
-      <p:sp>
-        <p:nvSpPr>
-          <p:cNvPr id="3" name="Text Placeholder 2">
-            <a:extLst>
-              <a:ext uri="{FF2B5EF4-FFF2-40B4-BE49-F238E27FC236}">
-                <a16:creationId xmlns:a16="http://schemas.microsoft.com/office/drawing/2014/main" id="{F757AD92-CBB4-EAC9-1F9B-34904F091BBE}"/>
-              </a:ext>
-            </a:extLst>
-          </p:cNvPr>
-          <p:cNvSpPr>
-            <a:spLocks noGrp="1"/>
-          </p:cNvSpPr>
-          <p:nvPr>
-            <p:ph type="body" sz="quarter" idx="10"/>
-          </p:nvPr>
-        </p:nvSpPr>
-        <p:spPr/>
-        <p:txBody>
-          <a:bodyPr/>
-          <a:lstStyle/>
-          <a:p>
-            <a:pPr marL="285750" indent="-285750">
-              <a:buFont typeface="Arial" panose="020B0604020202020204" pitchFamily="34" charset="0"/>
-              <a:buChar char="•"/>
-            </a:pPr>
-            <a:r>
-              <a:rPr lang="en-US" dirty="0"/>
-              <a:t>Asked </a:t>
-            </a:r>
-            <a:r>
-              <a:rPr lang="en-US" dirty="0" err="1"/>
-              <a:t>Niedra</a:t>
-            </a:r>
-            <a:r>
-              <a:rPr lang="en-US" dirty="0"/>
-              <a:t> for Summer Calendar</a:t>
-            </a:r>
-          </a:p>
-          <a:p>
-            <a:pPr marL="285750" indent="-285750">
-              <a:buFont typeface="Arial" panose="020B0604020202020204" pitchFamily="34" charset="0"/>
-              <a:buChar char="•"/>
-            </a:pPr>
-            <a:r>
-              <a:rPr lang="en-US" dirty="0"/>
-              <a:t>Told me it will act as “offer letter”</a:t>
-            </a:r>
-          </a:p>
-          <a:p>
-            <a:pPr marL="285750" indent="-285750">
-              <a:buFont typeface="Arial" panose="020B0604020202020204" pitchFamily="34" charset="0"/>
-              <a:buChar char="•"/>
-            </a:pPr>
-            <a:r>
-              <a:rPr lang="en-US" dirty="0"/>
-              <a:t>Relevant sections filled out</a:t>
-            </a:r>
-          </a:p>
-        </p:txBody>
-      </p:sp>
-      <p:sp>
-        <p:nvSpPr>
-          <p:cNvPr id="4" name="Title 3">
-            <a:extLst>
-              <a:ext uri="{FF2B5EF4-FFF2-40B4-BE49-F238E27FC236}">
-                <a16:creationId xmlns:a16="http://schemas.microsoft.com/office/drawing/2014/main" id="{4FA66B85-1F3C-B83F-90DA-ADA59B4505AC}"/>
-              </a:ext>
-            </a:extLst>
-          </p:cNvPr>
-          <p:cNvSpPr>
-            <a:spLocks noGrp="1"/>
-          </p:cNvSpPr>
-          <p:nvPr>
-            <p:ph type="title"/>
-          </p:nvPr>
-        </p:nvSpPr>
-        <p:spPr/>
-        <p:txBody>
-          <a:bodyPr/>
-          <a:lstStyle/>
-          <a:p>
-            <a:r>
-              <a:rPr lang="en-US" dirty="0"/>
-              <a:t>Summer Updates</a:t>
-            </a:r>
-          </a:p>
-        </p:txBody>
-      </p:sp>
-      <p:sp>
-        <p:nvSpPr>
-          <p:cNvPr id="5" name="Footer Placeholder 4">
-            <a:extLst>
-              <a:ext uri="{FF2B5EF4-FFF2-40B4-BE49-F238E27FC236}">
-                <a16:creationId xmlns:a16="http://schemas.microsoft.com/office/drawing/2014/main" id="{0CB7DCB6-88D5-8802-4BBD-8991C4F81BC8}"/>
-              </a:ext>
-            </a:extLst>
-          </p:cNvPr>
-          <p:cNvSpPr>
-            <a:spLocks noGrp="1"/>
-          </p:cNvSpPr>
-          <p:nvPr>
-            <p:ph type="ftr" sz="quarter" idx="12"/>
-          </p:nvPr>
-        </p:nvSpPr>
-        <p:spPr/>
-        <p:txBody>
-          <a:bodyPr/>
-          <a:lstStyle/>
-          <a:p>
-            <a:pPr algn="r"/>
-            <a:r>
-              <a:rPr lang="en-US"/>
-              <a:t>3/31/23            ‹#›</a:t>
-            </a:r>
-            <a:endParaRPr lang="en-US" dirty="0"/>
-          </a:p>
-        </p:txBody>
-      </p:sp>
       <p:pic>
         <p:nvPicPr>
-          <p:cNvPr id="7" name="Picture 6">
-            <a:extLst>
-              <a:ext uri="{FF2B5EF4-FFF2-40B4-BE49-F238E27FC236}">
-                <a16:creationId xmlns:a16="http://schemas.microsoft.com/office/drawing/2014/main" id="{08757880-116A-F2DE-03F1-6CB50ED75132}"/>
+          <p:cNvPr id="8" name="Picture 7">
+            <a:extLst>
+              <a:ext uri="{FF2B5EF4-FFF2-40B4-BE49-F238E27FC236}">
+                <a16:creationId xmlns:a16="http://schemas.microsoft.com/office/drawing/2014/main" id="{D3391C27-AB41-6CBB-7626-428BB976BBF6}"/>
               </a:ext>
             </a:extLst>
           </p:cNvPr>
@@ -14730,24 +14667,168 @@
         </p:nvPicPr>
         <p:blipFill>
           <a:blip r:embed="rId2"/>
+          <a:srcRect l="17885" r="2939" b="-3"/>
           <a:stretch>
             <a:fillRect/>
           </a:stretch>
         </p:blipFill>
         <p:spPr>
           <a:xfrm>
-            <a:off x="3461620" y="2668249"/>
-            <a:ext cx="4869580" cy="3336278"/>
+            <a:off x="334735" y="1543323"/>
+            <a:ext cx="4094045" cy="4317728"/>
           </a:xfrm>
           <a:prstGeom prst="rect">
             <a:avLst/>
           </a:prstGeom>
+          <a:noFill/>
         </p:spPr>
       </p:pic>
+      <p:sp>
+        <p:nvSpPr>
+          <p:cNvPr id="4" name="Title 3">
+            <a:extLst>
+              <a:ext uri="{FF2B5EF4-FFF2-40B4-BE49-F238E27FC236}">
+                <a16:creationId xmlns:a16="http://schemas.microsoft.com/office/drawing/2014/main" id="{7ADFF263-9428-1CA8-E5B8-0F702A65A575}"/>
+              </a:ext>
+            </a:extLst>
+          </p:cNvPr>
+          <p:cNvSpPr>
+            <a:spLocks noGrp="1"/>
+          </p:cNvSpPr>
+          <p:nvPr>
+            <p:ph type="title"/>
+          </p:nvPr>
+        </p:nvSpPr>
+        <p:spPr>
+          <a:xfrm>
+            <a:off x="351064" y="385004"/>
+            <a:ext cx="8450036" cy="589032"/>
+          </a:xfrm>
+        </p:spPr>
+        <p:txBody>
+          <a:bodyPr anchor="ctr">
+            <a:normAutofit/>
+          </a:bodyPr>
+          <a:lstStyle/>
+          <a:p>
+            <a:r>
+              <a:rPr lang="en-US" dirty="0"/>
+              <a:t>Summer Updates</a:t>
+            </a:r>
+          </a:p>
+        </p:txBody>
+      </p:sp>
+      <p:pic>
+        <p:nvPicPr>
+          <p:cNvPr id="6" name="Picture 5">
+            <a:extLst>
+              <a:ext uri="{FF2B5EF4-FFF2-40B4-BE49-F238E27FC236}">
+                <a16:creationId xmlns:a16="http://schemas.microsoft.com/office/drawing/2014/main" id="{F2015592-8EAE-A448-DD12-44CD504CF832}"/>
+              </a:ext>
+            </a:extLst>
+          </p:cNvPr>
+          <p:cNvPicPr>
+            <a:picLocks noChangeAspect="1"/>
+          </p:cNvPicPr>
+          <p:nvPr/>
+        </p:nvPicPr>
+        <p:blipFill>
+          <a:blip r:embed="rId3"/>
+          <a:srcRect l="22995" r="38839" b="-1"/>
+          <a:stretch>
+            <a:fillRect/>
+          </a:stretch>
+        </p:blipFill>
+        <p:spPr>
+          <a:xfrm>
+            <a:off x="4715222" y="1543323"/>
+            <a:ext cx="4094045" cy="4317728"/>
+          </a:xfrm>
+          <a:prstGeom prst="rect">
+            <a:avLst/>
+          </a:prstGeom>
+          <a:noFill/>
+        </p:spPr>
+      </p:pic>
+      <p:sp>
+        <p:nvSpPr>
+          <p:cNvPr id="2" name="Text Placeholder 1">
+            <a:extLst>
+              <a:ext uri="{FF2B5EF4-FFF2-40B4-BE49-F238E27FC236}">
+                <a16:creationId xmlns:a16="http://schemas.microsoft.com/office/drawing/2014/main" id="{E99F78C8-F24C-7278-BB5C-75F842CA3BDF}"/>
+              </a:ext>
+            </a:extLst>
+          </p:cNvPr>
+          <p:cNvSpPr>
+            <a:spLocks noGrp="1"/>
+          </p:cNvSpPr>
+          <p:nvPr>
+            <p:ph type="body" sz="quarter" idx="13"/>
+          </p:nvPr>
+        </p:nvSpPr>
+        <p:spPr>
+          <a:xfrm>
+            <a:off x="342900" y="954291"/>
+            <a:ext cx="8458200" cy="365760"/>
+          </a:xfrm>
+        </p:spPr>
+        <p:txBody>
+          <a:bodyPr>
+            <a:normAutofit lnSpcReduction="10000"/>
+          </a:bodyPr>
+          <a:lstStyle/>
+          <a:p>
+            <a:r>
+              <a:rPr lang="en-US" dirty="0"/>
+              <a:t>Summer Calendar Submitted and Signed</a:t>
+            </a:r>
+          </a:p>
+        </p:txBody>
+      </p:sp>
+      <p:sp>
+        <p:nvSpPr>
+          <p:cNvPr id="5" name="Footer Placeholder 4">
+            <a:extLst>
+              <a:ext uri="{FF2B5EF4-FFF2-40B4-BE49-F238E27FC236}">
+                <a16:creationId xmlns:a16="http://schemas.microsoft.com/office/drawing/2014/main" id="{0489ED17-7247-9D2F-86FD-88680F0AC65B}"/>
+              </a:ext>
+            </a:extLst>
+          </p:cNvPr>
+          <p:cNvSpPr>
+            <a:spLocks noGrp="1"/>
+          </p:cNvSpPr>
+          <p:nvPr>
+            <p:ph type="ftr" sz="quarter" idx="14"/>
+          </p:nvPr>
+        </p:nvSpPr>
+        <p:spPr>
+          <a:xfrm>
+            <a:off x="7461174" y="6295058"/>
+            <a:ext cx="1339925" cy="323970"/>
+          </a:xfrm>
+        </p:spPr>
+        <p:txBody>
+          <a:bodyPr anchor="ctr">
+            <a:normAutofit/>
+          </a:bodyPr>
+          <a:lstStyle/>
+          <a:p>
+            <a:pPr algn="r">
+              <a:spcAft>
+                <a:spcPts val="600"/>
+              </a:spcAft>
+            </a:pPr>
+            <a:r>
+              <a:rPr lang="en-US"/>
+              <a:t>3/31/23            ‹#›</a:t>
+            </a:r>
+          </a:p>
+        </p:txBody>
+      </p:sp>
     </p:spTree>
     <p:extLst>
       <p:ext uri="{BB962C8B-B14F-4D97-AF65-F5344CB8AC3E}">
-        <p14:creationId xmlns:p14="http://schemas.microsoft.com/office/powerpoint/2010/main" val="3016960350"/>
+        <p14:creationId xmlns:p14="http://schemas.microsoft.com/office/powerpoint/2010/main" val="746291089"/>
       </p:ext>
     </p:extLst>
   </p:cSld>
@@ -14779,7 +14860,7 @@
           <p:cNvPr id="2" name="Text Placeholder 1">
             <a:extLst>
               <a:ext uri="{FF2B5EF4-FFF2-40B4-BE49-F238E27FC236}">
-                <a16:creationId xmlns:a16="http://schemas.microsoft.com/office/drawing/2014/main" id="{A7344A2F-6F8F-4ACB-1D3F-5281D65B4821}"/>
+                <a16:creationId xmlns:a16="http://schemas.microsoft.com/office/drawing/2014/main" id="{059C2505-4B84-A349-C668-3F3894CA795A}"/>
               </a:ext>
             </a:extLst>
           </p:cNvPr>
@@ -14797,7 +14878,7 @@
           <a:p>
             <a:r>
               <a:rPr lang="en-US" dirty="0"/>
-              <a:t>Work for Summer Outlined</a:t>
+              <a:t>Required Trainings Completed</a:t>
             </a:r>
           </a:p>
         </p:txBody>
@@ -14807,7 +14888,7 @@
           <p:cNvPr id="3" name="Text Placeholder 2">
             <a:extLst>
               <a:ext uri="{FF2B5EF4-FFF2-40B4-BE49-F238E27FC236}">
-                <a16:creationId xmlns:a16="http://schemas.microsoft.com/office/drawing/2014/main" id="{9B4551A6-A1F1-8860-9ECB-FDF3EF075856}"/>
+                <a16:creationId xmlns:a16="http://schemas.microsoft.com/office/drawing/2014/main" id="{77A66639-A00C-0B57-3084-E2A2A893567B}"/>
               </a:ext>
             </a:extLst>
           </p:cNvPr>
@@ -14828,8 +14909,8 @@
               <a:buChar char="•"/>
             </a:pPr>
             <a:r>
-              <a:rPr lang="en-US" b="1" dirty="0"/>
-              <a:t>Explore all 3 options of data collection storage as outlined previously</a:t>
+              <a:rPr lang="en-US" dirty="0"/>
+              <a:t>Responsible Conduct of Research (RCR)</a:t>
             </a:r>
           </a:p>
           <a:p>
@@ -14839,37 +14920,7 @@
             </a:pPr>
             <a:r>
               <a:rPr lang="en-US" dirty="0"/>
-              <a:t>Design and fabricate a two new versions of the PCB:</a:t>
-            </a:r>
-          </a:p>
-          <a:p>
-            <a:pPr marL="628650" lvl="1" indent="-285750">
-              <a:buFont typeface="Arial" panose="020B0604020202020204" pitchFamily="34" charset="0"/>
-              <a:buChar char="•"/>
-            </a:pPr>
-            <a:r>
-              <a:rPr lang="en-US" dirty="0"/>
-              <a:t>Smaller without RFID -&gt; DC conversion</a:t>
-            </a:r>
-          </a:p>
-          <a:p>
-            <a:pPr marL="628650" lvl="1" indent="-285750">
-              <a:buFont typeface="Arial" panose="020B0604020202020204" pitchFamily="34" charset="0"/>
-              <a:buChar char="•"/>
-            </a:pPr>
-            <a:r>
-              <a:rPr lang="en-US" dirty="0"/>
-              <a:t>Larger with RFID -&gt; DC conversion</a:t>
-            </a:r>
-          </a:p>
-          <a:p>
-            <a:pPr marL="285750" indent="-285750">
-              <a:buFont typeface="Arial" panose="020B0604020202020204" pitchFamily="34" charset="0"/>
-              <a:buChar char="•"/>
-            </a:pPr>
-            <a:r>
-              <a:rPr lang="en-US" dirty="0"/>
-              <a:t>Expanding the data collection capabilities</a:t>
+              <a:t>Ethics Training</a:t>
             </a:r>
           </a:p>
         </p:txBody>
@@ -14879,7 +14930,7 @@
           <p:cNvPr id="4" name="Title 3">
             <a:extLst>
               <a:ext uri="{FF2B5EF4-FFF2-40B4-BE49-F238E27FC236}">
-                <a16:creationId xmlns:a16="http://schemas.microsoft.com/office/drawing/2014/main" id="{C0E18DF5-A4DE-9794-CD82-204F5EAFBEE5}"/>
+                <a16:creationId xmlns:a16="http://schemas.microsoft.com/office/drawing/2014/main" id="{E4E336BE-E7F8-786B-D2FF-C9A1B92EF7FA}"/>
               </a:ext>
             </a:extLst>
           </p:cNvPr>
@@ -14897,7 +14948,7 @@
           <a:p>
             <a:r>
               <a:rPr lang="en-US" dirty="0"/>
-              <a:t>Summer Updates</a:t>
+              <a:t>Training Updates</a:t>
             </a:r>
           </a:p>
         </p:txBody>
@@ -14907,7 +14958,7 @@
           <p:cNvPr id="5" name="Footer Placeholder 4">
             <a:extLst>
               <a:ext uri="{FF2B5EF4-FFF2-40B4-BE49-F238E27FC236}">
-                <a16:creationId xmlns:a16="http://schemas.microsoft.com/office/drawing/2014/main" id="{65925B22-BF00-38DE-88FD-396D985D6FFD}"/>
+                <a16:creationId xmlns:a16="http://schemas.microsoft.com/office/drawing/2014/main" id="{3FFD0753-F465-0006-D083-51AE933A97AC}"/>
               </a:ext>
             </a:extLst>
           </p:cNvPr>
@@ -14935,7 +14986,7 @@
     </p:spTree>
     <p:extLst>
       <p:ext uri="{BB962C8B-B14F-4D97-AF65-F5344CB8AC3E}">
-        <p14:creationId xmlns:p14="http://schemas.microsoft.com/office/powerpoint/2010/main" val="1921644133"/>
+        <p14:creationId xmlns:p14="http://schemas.microsoft.com/office/powerpoint/2010/main" val="2102298351"/>
       </p:ext>
     </p:extLst>
   </p:cSld>
@@ -15016,8 +15067,28 @@
               <a:buChar char="•"/>
             </a:pPr>
             <a:r>
-              <a:rPr lang="en-US" dirty="0"/>
-              <a:t>Implement cloud storage for data collection</a:t>
+              <a:rPr lang="en-US" strike="sngStrike" dirty="0"/>
+              <a:t>Look into AWS as potential data storage solution</a:t>
+            </a:r>
+          </a:p>
+          <a:p>
+            <a:pPr marL="628650" lvl="1" indent="-285750">
+              <a:buFont typeface="Arial" panose="020B0604020202020204" pitchFamily="34" charset="0"/>
+              <a:buChar char="•"/>
+            </a:pPr>
+            <a:r>
+              <a:rPr lang="en-US" strike="sngStrike" dirty="0"/>
+              <a:t>S3 bucket is very cheap</a:t>
+            </a:r>
+          </a:p>
+          <a:p>
+            <a:pPr marL="628650" lvl="1" indent="-285750">
+              <a:buFont typeface="Arial" panose="020B0604020202020204" pitchFamily="34" charset="0"/>
+              <a:buChar char="•"/>
+            </a:pPr>
+            <a:r>
+              <a:rPr lang="en-US" strike="sngStrike" dirty="0"/>
+              <a:t>Other options could open up</a:t>
             </a:r>
           </a:p>
           <a:p>
@@ -15027,8 +15098,52 @@
             </a:pPr>
             <a:r>
               <a:rPr lang="en-US" dirty="0"/>
-              <a:t>Create new schematic for P1110B power harvester device</a:t>
-            </a:r>
+              <a:t>Before Sync-Up:</a:t>
+            </a:r>
+          </a:p>
+          <a:p>
+            <a:pPr marL="628650" lvl="1" indent="-285750">
+              <a:buFont typeface="Arial" panose="020B0604020202020204" pitchFamily="34" charset="0"/>
+              <a:buChar char="•"/>
+            </a:pPr>
+            <a:r>
+              <a:rPr lang="en-US" dirty="0"/>
+              <a:t>Getting demonstration to work</a:t>
+            </a:r>
+          </a:p>
+          <a:p>
+            <a:pPr marL="628650" lvl="1" indent="-285750">
+              <a:buFont typeface="Arial" panose="020B0604020202020204" pitchFamily="34" charset="0"/>
+              <a:buChar char="•"/>
+            </a:pPr>
+            <a:r>
+              <a:rPr lang="en-US" dirty="0"/>
+              <a:t>Showing Omosalewa how to program the firmware for the updated Nicla Sense code</a:t>
+            </a:r>
+          </a:p>
+          <a:p>
+            <a:pPr marL="628650" lvl="1" indent="-285750">
+              <a:buFont typeface="Arial" panose="020B0604020202020204" pitchFamily="34" charset="0"/>
+              <a:buChar char="•"/>
+            </a:pPr>
+            <a:r>
+              <a:rPr lang="en-US" dirty="0"/>
+              <a:t>Find a good time to meet with Omosalewa in-person moving forward</a:t>
+            </a:r>
+          </a:p>
+          <a:p>
+            <a:pPr marL="628650" lvl="1" indent="-285750">
+              <a:buFont typeface="Arial" panose="020B0604020202020204" pitchFamily="34" charset="0"/>
+              <a:buChar char="•"/>
+            </a:pPr>
+            <a:endParaRPr lang="en-US" dirty="0"/>
+          </a:p>
+          <a:p>
+            <a:pPr marL="285750" indent="-285750">
+              <a:buFont typeface="Arial" panose="020B0604020202020204" pitchFamily="34" charset="0"/>
+              <a:buChar char="•"/>
+            </a:pPr>
+            <a:endParaRPr lang="en-US" dirty="0"/>
           </a:p>
           <a:p>
             <a:pPr marL="285750" indent="-285750">
@@ -15780,6 +15895,15 @@
 </file>
 
 <file path=customXml/item1.xml><?xml version="1.0" encoding="utf-8"?>
+<?mso-contentType ?>
+<FormTemplates xmlns="http://schemas.microsoft.com/sharepoint/v3/contenttype/forms">
+  <Display>DocumentLibraryForm</Display>
+  <Edit>DocumentLibraryForm</Edit>
+  <New>DocumentLibraryForm</New>
+</FormTemplates>
+</file>
+
+<file path=customXml/item2.xml><?xml version="1.0" encoding="utf-8"?>
 <p:properties xmlns:p="http://schemas.microsoft.com/office/2006/metadata/properties" xmlns:xsi="http://www.w3.org/2001/XMLSchema-instance" xmlns:pc="http://schemas.microsoft.com/office/infopath/2007/PartnerControls">
   <documentManagement>
     <SharedWithUsers xmlns="d6656b4d-3fa0-4709-acfb-d5e813445d1e">
@@ -15820,15 +15944,6 @@
     <TaxCatchAll xmlns="d6656b4d-3fa0-4709-acfb-d5e813445d1e" xsi:nil="true"/>
   </documentManagement>
 </p:properties>
-</file>
-
-<file path=customXml/item2.xml><?xml version="1.0" encoding="utf-8"?>
-<?mso-contentType ?>
-<FormTemplates xmlns="http://schemas.microsoft.com/sharepoint/v3/contenttype/forms">
-  <Display>DocumentLibraryForm</Display>
-  <Edit>DocumentLibraryForm</Edit>
-  <New>DocumentLibraryForm</New>
-</FormTemplates>
 </file>
 
 <file path=customXml/item3.xml><?xml version="1.0" encoding="utf-8"?>
@@ -16055,6 +16170,14 @@
 </file>
 
 <file path=customXml/itemProps1.xml><?xml version="1.0" encoding="utf-8"?>
+<ds:datastoreItem xmlns:ds="http://schemas.openxmlformats.org/officeDocument/2006/customXml" ds:itemID="{F5B64EEB-1B4A-4920-AA44-E234D7D487D1}">
+  <ds:schemaRefs>
+    <ds:schemaRef ds:uri="http://schemas.microsoft.com/sharepoint/v3/contenttype/forms"/>
+  </ds:schemaRefs>
+</ds:datastoreItem>
+</file>
+
+<file path=customXml/itemProps2.xml><?xml version="1.0" encoding="utf-8"?>
 <ds:datastoreItem xmlns:ds="http://schemas.openxmlformats.org/officeDocument/2006/customXml" ds:itemID="{21DE0D6C-581B-4814-98E7-EF172D5D46A1}">
   <ds:schemaRefs>
     <ds:schemaRef ds:uri="http://purl.org/dc/elements/1.1/"/>
@@ -16067,14 +16190,6 @@
     <ds:schemaRef ds:uri="http://schemas.microsoft.com/office/2006/metadata/properties"/>
     <ds:schemaRef ds:uri="http://www.w3.org/XML/1998/namespace"/>
     <ds:schemaRef ds:uri="http://purl.org/dc/dcmitype/"/>
-  </ds:schemaRefs>
-</ds:datastoreItem>
-</file>
-
-<file path=customXml/itemProps2.xml><?xml version="1.0" encoding="utf-8"?>
-<ds:datastoreItem xmlns:ds="http://schemas.openxmlformats.org/officeDocument/2006/customXml" ds:itemID="{F5B64EEB-1B4A-4920-AA44-E234D7D487D1}">
-  <ds:schemaRefs>
-    <ds:schemaRef ds:uri="http://schemas.microsoft.com/sharepoint/v3/contenttype/forms"/>
   </ds:schemaRefs>
 </ds:datastoreItem>
 </file>
